--- a/files/Записка/Kuznetsov_Ivan_prezentacia.pptx
+++ b/files/Записка/Kuznetsov_Ivan_prezentacia.pptx
@@ -7,9 +7,10 @@
   <p:sldIdLst>
     <p:sldId id="256" r:id="rId2"/>
     <p:sldId id="257" r:id="rId3"/>
-    <p:sldId id="258" r:id="rId4"/>
-    <p:sldId id="259" r:id="rId5"/>
-    <p:sldId id="260" r:id="rId6"/>
+    <p:sldId id="261" r:id="rId4"/>
+    <p:sldId id="258" r:id="rId5"/>
+    <p:sldId id="259" r:id="rId6"/>
+    <p:sldId id="260" r:id="rId7"/>
   </p:sldIdLst>
   <p:sldSz cx="12192000" cy="6858000"/>
   <p:notesSz cx="6858000" cy="9144000"/>
@@ -108,6 +109,11 @@
       </a:defRPr>
     </a:lvl9pPr>
   </p:defaultTextStyle>
+  <p:extLst>
+    <p:ext uri="{EFAFB233-063F-42B5-8137-9DF3F51BA10A}">
+      <p15:sldGuideLst xmlns:p15="http://schemas.microsoft.com/office/powerpoint/2012/main"/>
+    </p:ext>
+  </p:extLst>
 </p:presentation>
 </file>
 
@@ -260,7 +266,7 @@
           <a:p>
             <a:fld id="{1A670E6B-6FFF-4C4E-911D-FC811DD883A8}" type="datetimeFigureOut">
               <a:rPr lang="ru-RU" smtClean="0"/>
-              <a:t>13.06.2023</a:t>
+              <a:t>14.06.2023</a:t>
             </a:fld>
             <a:endParaRPr lang="ru-RU"/>
           </a:p>
@@ -460,7 +466,7 @@
           <a:p>
             <a:fld id="{1A670E6B-6FFF-4C4E-911D-FC811DD883A8}" type="datetimeFigureOut">
               <a:rPr lang="ru-RU" smtClean="0"/>
-              <a:t>13.06.2023</a:t>
+              <a:t>14.06.2023</a:t>
             </a:fld>
             <a:endParaRPr lang="ru-RU"/>
           </a:p>
@@ -670,7 +676,7 @@
           <a:p>
             <a:fld id="{1A670E6B-6FFF-4C4E-911D-FC811DD883A8}" type="datetimeFigureOut">
               <a:rPr lang="ru-RU" smtClean="0"/>
-              <a:t>13.06.2023</a:t>
+              <a:t>14.06.2023</a:t>
             </a:fld>
             <a:endParaRPr lang="ru-RU"/>
           </a:p>
@@ -870,7 +876,7 @@
           <a:p>
             <a:fld id="{1A670E6B-6FFF-4C4E-911D-FC811DD883A8}" type="datetimeFigureOut">
               <a:rPr lang="ru-RU" smtClean="0"/>
-              <a:t>13.06.2023</a:t>
+              <a:t>14.06.2023</a:t>
             </a:fld>
             <a:endParaRPr lang="ru-RU"/>
           </a:p>
@@ -1146,7 +1152,7 @@
           <a:p>
             <a:fld id="{1A670E6B-6FFF-4C4E-911D-FC811DD883A8}" type="datetimeFigureOut">
               <a:rPr lang="ru-RU" smtClean="0"/>
-              <a:t>13.06.2023</a:t>
+              <a:t>14.06.2023</a:t>
             </a:fld>
             <a:endParaRPr lang="ru-RU"/>
           </a:p>
@@ -1414,7 +1420,7 @@
           <a:p>
             <a:fld id="{1A670E6B-6FFF-4C4E-911D-FC811DD883A8}" type="datetimeFigureOut">
               <a:rPr lang="ru-RU" smtClean="0"/>
-              <a:t>13.06.2023</a:t>
+              <a:t>14.06.2023</a:t>
             </a:fld>
             <a:endParaRPr lang="ru-RU"/>
           </a:p>
@@ -1829,7 +1835,7 @@
           <a:p>
             <a:fld id="{1A670E6B-6FFF-4C4E-911D-FC811DD883A8}" type="datetimeFigureOut">
               <a:rPr lang="ru-RU" smtClean="0"/>
-              <a:t>13.06.2023</a:t>
+              <a:t>14.06.2023</a:t>
             </a:fld>
             <a:endParaRPr lang="ru-RU"/>
           </a:p>
@@ -1971,7 +1977,7 @@
           <a:p>
             <a:fld id="{1A670E6B-6FFF-4C4E-911D-FC811DD883A8}" type="datetimeFigureOut">
               <a:rPr lang="ru-RU" smtClean="0"/>
-              <a:t>13.06.2023</a:t>
+              <a:t>14.06.2023</a:t>
             </a:fld>
             <a:endParaRPr lang="ru-RU"/>
           </a:p>
@@ -2084,7 +2090,7 @@
           <a:p>
             <a:fld id="{1A670E6B-6FFF-4C4E-911D-FC811DD883A8}" type="datetimeFigureOut">
               <a:rPr lang="ru-RU" smtClean="0"/>
-              <a:t>13.06.2023</a:t>
+              <a:t>14.06.2023</a:t>
             </a:fld>
             <a:endParaRPr lang="ru-RU"/>
           </a:p>
@@ -2397,7 +2403,7 @@
           <a:p>
             <a:fld id="{1A670E6B-6FFF-4C4E-911D-FC811DD883A8}" type="datetimeFigureOut">
               <a:rPr lang="ru-RU" smtClean="0"/>
-              <a:t>13.06.2023</a:t>
+              <a:t>14.06.2023</a:t>
             </a:fld>
             <a:endParaRPr lang="ru-RU"/>
           </a:p>
@@ -2686,7 +2692,7 @@
           <a:p>
             <a:fld id="{1A670E6B-6FFF-4C4E-911D-FC811DD883A8}" type="datetimeFigureOut">
               <a:rPr lang="ru-RU" smtClean="0"/>
-              <a:t>13.06.2023</a:t>
+              <a:t>14.06.2023</a:t>
             </a:fld>
             <a:endParaRPr lang="ru-RU"/>
           </a:p>
@@ -2929,7 +2935,7 @@
           <a:p>
             <a:fld id="{1A670E6B-6FFF-4C4E-911D-FC811DD883A8}" type="datetimeFigureOut">
               <a:rPr lang="ru-RU" smtClean="0"/>
-              <a:t>13.06.2023</a:t>
+              <a:t>14.06.2023</a:t>
             </a:fld>
             <a:endParaRPr lang="ru-RU"/>
           </a:p>
@@ -3370,8 +3376,15 @@
           <a:lstStyle/>
           <a:p>
             <a:r>
-              <a:rPr lang="ru-RU" dirty="0"/>
+              <a:rPr lang="ru-RU" sz="4400" dirty="0"/>
               <a:t>Разработка приложения для подготовки бухгалтерских форм отчётности</a:t>
+            </a:r>
+            <a:br>
+              <a:rPr lang="en-US" sz="4400" dirty="0"/>
+            </a:br>
+            <a:r>
+              <a:rPr lang="ru-RU" sz="4400" dirty="0"/>
+              <a:t>ЯО ГПОУ РПК</a:t>
             </a:r>
           </a:p>
         </p:txBody>
@@ -3540,6 +3553,96 @@
           <p:cNvPr id="2" name="Title 1">
             <a:extLst>
               <a:ext uri="{FF2B5EF4-FFF2-40B4-BE49-F238E27FC236}">
+                <a16:creationId xmlns:a16="http://schemas.microsoft.com/office/drawing/2014/main" id="{1B625CAE-FABE-476C-A3A8-F5202519D066}"/>
+              </a:ext>
+            </a:extLst>
+          </p:cNvPr>
+          <p:cNvSpPr>
+            <a:spLocks noGrp="1"/>
+          </p:cNvSpPr>
+          <p:nvPr>
+            <p:ph type="title"/>
+          </p:nvPr>
+        </p:nvSpPr>
+        <p:spPr/>
+        <p:txBody>
+          <a:bodyPr/>
+          <a:lstStyle/>
+          <a:p>
+            <a:r>
+              <a:rPr lang="ru-RU" dirty="0"/>
+              <a:t>Внешний вид приложения</a:t>
+            </a:r>
+          </a:p>
+        </p:txBody>
+      </p:sp>
+      <p:pic>
+        <p:nvPicPr>
+          <p:cNvPr id="4" name="Content Placeholder 3">
+            <a:extLst>
+              <a:ext uri="{FF2B5EF4-FFF2-40B4-BE49-F238E27FC236}">
+                <a16:creationId xmlns:a16="http://schemas.microsoft.com/office/drawing/2014/main" id="{D4D49263-1C1C-4751-8A0A-9B304483C940}"/>
+              </a:ext>
+            </a:extLst>
+          </p:cNvPr>
+          <p:cNvPicPr>
+            <a:picLocks noGrp="1"/>
+          </p:cNvPicPr>
+          <p:nvPr>
+            <p:ph idx="1"/>
+          </p:nvPr>
+        </p:nvPicPr>
+        <p:blipFill>
+          <a:blip r:embed="rId2"/>
+          <a:stretch>
+            <a:fillRect/>
+          </a:stretch>
+        </p:blipFill>
+        <p:spPr>
+          <a:xfrm>
+            <a:off x="2286476" y="1858437"/>
+            <a:ext cx="7619048" cy="4285714"/>
+          </a:xfrm>
+          <a:prstGeom prst="rect">
+            <a:avLst/>
+          </a:prstGeom>
+        </p:spPr>
+      </p:pic>
+    </p:spTree>
+    <p:extLst>
+      <p:ext uri="{BB962C8B-B14F-4D97-AF65-F5344CB8AC3E}">
+        <p14:creationId xmlns:p14="http://schemas.microsoft.com/office/powerpoint/2010/main" val="3284779595"/>
+      </p:ext>
+    </p:extLst>
+  </p:cSld>
+  <p:clrMapOvr>
+    <a:masterClrMapping/>
+  </p:clrMapOvr>
+</p:sld>
+</file>
+
+<file path=ppt/slides/slide4.xml><?xml version="1.0" encoding="utf-8"?>
+<p:sld xmlns:a="http://schemas.openxmlformats.org/drawingml/2006/main" xmlns:r="http://schemas.openxmlformats.org/officeDocument/2006/relationships" xmlns:p="http://schemas.openxmlformats.org/presentationml/2006/main">
+  <p:cSld>
+    <p:spTree>
+      <p:nvGrpSpPr>
+        <p:cNvPr id="1" name=""/>
+        <p:cNvGrpSpPr/>
+        <p:nvPr/>
+      </p:nvGrpSpPr>
+      <p:grpSpPr>
+        <a:xfrm>
+          <a:off x="0" y="0"/>
+          <a:ext cx="0" cy="0"/>
+          <a:chOff x="0" y="0"/>
+          <a:chExt cx="0" cy="0"/>
+        </a:xfrm>
+      </p:grpSpPr>
+      <p:sp>
+        <p:nvSpPr>
+          <p:cNvPr id="2" name="Title 1">
+            <a:extLst>
+              <a:ext uri="{FF2B5EF4-FFF2-40B4-BE49-F238E27FC236}">
                 <a16:creationId xmlns:a16="http://schemas.microsoft.com/office/drawing/2014/main" id="{46F288D6-02C3-41F5-BA49-B0E446883736}"/>
               </a:ext>
             </a:extLst>
@@ -3608,7 +3711,7 @@
 </p:sld>
 </file>
 
-<file path=ppt/slides/slide4.xml><?xml version="1.0" encoding="utf-8"?>
+<file path=ppt/slides/slide5.xml><?xml version="1.0" encoding="utf-8"?>
 <p:sld xmlns:a="http://schemas.openxmlformats.org/drawingml/2006/main" xmlns:r="http://schemas.openxmlformats.org/officeDocument/2006/relationships" xmlns:p="http://schemas.openxmlformats.org/presentationml/2006/main">
   <p:cSld>
     <p:spTree>
@@ -3698,7 +3801,7 @@
 </p:sld>
 </file>
 
-<file path=ppt/slides/slide5.xml><?xml version="1.0" encoding="utf-8"?>
+<file path=ppt/slides/slide6.xml><?xml version="1.0" encoding="utf-8"?>
 <p:sld xmlns:a="http://schemas.openxmlformats.org/drawingml/2006/main" xmlns:r="http://schemas.openxmlformats.org/officeDocument/2006/relationships" xmlns:p="http://schemas.openxmlformats.org/presentationml/2006/main">
   <p:cSld>
     <p:spTree>

--- a/files/Записка/Kuznetsov_Ivan_prezentacia.pptx
+++ b/files/Записка/Kuznetsov_Ivan_prezentacia.pptx
@@ -5,7 +5,7 @@
     <p:sldMasterId id="2147483648" r:id="rId1"/>
   </p:sldMasterIdLst>
   <p:sldIdLst>
-    <p:sldId id="256" r:id="rId2"/>
+    <p:sldId id="262" r:id="rId2"/>
     <p:sldId id="257" r:id="rId3"/>
     <p:sldId id="261" r:id="rId4"/>
     <p:sldId id="258" r:id="rId5"/>
@@ -266,7 +266,7 @@
           <a:p>
             <a:fld id="{1A670E6B-6FFF-4C4E-911D-FC811DD883A8}" type="datetimeFigureOut">
               <a:rPr lang="ru-RU" smtClean="0"/>
-              <a:t>14.06.2023</a:t>
+              <a:t>16.06.2023</a:t>
             </a:fld>
             <a:endParaRPr lang="ru-RU"/>
           </a:p>
@@ -466,7 +466,7 @@
           <a:p>
             <a:fld id="{1A670E6B-6FFF-4C4E-911D-FC811DD883A8}" type="datetimeFigureOut">
               <a:rPr lang="ru-RU" smtClean="0"/>
-              <a:t>14.06.2023</a:t>
+              <a:t>16.06.2023</a:t>
             </a:fld>
             <a:endParaRPr lang="ru-RU"/>
           </a:p>
@@ -676,7 +676,7 @@
           <a:p>
             <a:fld id="{1A670E6B-6FFF-4C4E-911D-FC811DD883A8}" type="datetimeFigureOut">
               <a:rPr lang="ru-RU" smtClean="0"/>
-              <a:t>14.06.2023</a:t>
+              <a:t>16.06.2023</a:t>
             </a:fld>
             <a:endParaRPr lang="ru-RU"/>
           </a:p>
@@ -876,7 +876,7 @@
           <a:p>
             <a:fld id="{1A670E6B-6FFF-4C4E-911D-FC811DD883A8}" type="datetimeFigureOut">
               <a:rPr lang="ru-RU" smtClean="0"/>
-              <a:t>14.06.2023</a:t>
+              <a:t>16.06.2023</a:t>
             </a:fld>
             <a:endParaRPr lang="ru-RU"/>
           </a:p>
@@ -1152,7 +1152,7 @@
           <a:p>
             <a:fld id="{1A670E6B-6FFF-4C4E-911D-FC811DD883A8}" type="datetimeFigureOut">
               <a:rPr lang="ru-RU" smtClean="0"/>
-              <a:t>14.06.2023</a:t>
+              <a:t>16.06.2023</a:t>
             </a:fld>
             <a:endParaRPr lang="ru-RU"/>
           </a:p>
@@ -1420,7 +1420,7 @@
           <a:p>
             <a:fld id="{1A670E6B-6FFF-4C4E-911D-FC811DD883A8}" type="datetimeFigureOut">
               <a:rPr lang="ru-RU" smtClean="0"/>
-              <a:t>14.06.2023</a:t>
+              <a:t>16.06.2023</a:t>
             </a:fld>
             <a:endParaRPr lang="ru-RU"/>
           </a:p>
@@ -1835,7 +1835,7 @@
           <a:p>
             <a:fld id="{1A670E6B-6FFF-4C4E-911D-FC811DD883A8}" type="datetimeFigureOut">
               <a:rPr lang="ru-RU" smtClean="0"/>
-              <a:t>14.06.2023</a:t>
+              <a:t>16.06.2023</a:t>
             </a:fld>
             <a:endParaRPr lang="ru-RU"/>
           </a:p>
@@ -1977,7 +1977,7 @@
           <a:p>
             <a:fld id="{1A670E6B-6FFF-4C4E-911D-FC811DD883A8}" type="datetimeFigureOut">
               <a:rPr lang="ru-RU" smtClean="0"/>
-              <a:t>14.06.2023</a:t>
+              <a:t>16.06.2023</a:t>
             </a:fld>
             <a:endParaRPr lang="ru-RU"/>
           </a:p>
@@ -2090,7 +2090,7 @@
           <a:p>
             <a:fld id="{1A670E6B-6FFF-4C4E-911D-FC811DD883A8}" type="datetimeFigureOut">
               <a:rPr lang="ru-RU" smtClean="0"/>
-              <a:t>14.06.2023</a:t>
+              <a:t>16.06.2023</a:t>
             </a:fld>
             <a:endParaRPr lang="ru-RU"/>
           </a:p>
@@ -2403,7 +2403,7 @@
           <a:p>
             <a:fld id="{1A670E6B-6FFF-4C4E-911D-FC811DD883A8}" type="datetimeFigureOut">
               <a:rPr lang="ru-RU" smtClean="0"/>
-              <a:t>14.06.2023</a:t>
+              <a:t>16.06.2023</a:t>
             </a:fld>
             <a:endParaRPr lang="ru-RU"/>
           </a:p>
@@ -2692,7 +2692,7 @@
           <a:p>
             <a:fld id="{1A670E6B-6FFF-4C4E-911D-FC811DD883A8}" type="datetimeFigureOut">
               <a:rPr lang="ru-RU" smtClean="0"/>
-              <a:t>14.06.2023</a:t>
+              <a:t>16.06.2023</a:t>
             </a:fld>
             <a:endParaRPr lang="ru-RU"/>
           </a:p>
@@ -2935,7 +2935,7 @@
           <a:p>
             <a:fld id="{1A670E6B-6FFF-4C4E-911D-FC811DD883A8}" type="datetimeFigureOut">
               <a:rPr lang="ru-RU" smtClean="0"/>
-              <a:t>14.06.2023</a:t>
+              <a:t>16.06.2023</a:t>
             </a:fld>
             <a:endParaRPr lang="ru-RU"/>
           </a:p>
@@ -3354,13 +3354,7 @@
       </p:grpSpPr>
       <p:sp>
         <p:nvSpPr>
-          <p:cNvPr id="2" name="Title 1">
-            <a:extLst>
-              <a:ext uri="{FF2B5EF4-FFF2-40B4-BE49-F238E27FC236}">
-                <a16:creationId xmlns:a16="http://schemas.microsoft.com/office/drawing/2014/main" id="{2E636A6F-9295-4918-A01F-1B4DD0BFA721}"/>
-              </a:ext>
-            </a:extLst>
-          </p:cNvPr>
+          <p:cNvPr id="2" name="Заголовок 1"/>
           <p:cNvSpPr>
             <a:spLocks noGrp="1"/>
           </p:cNvSpPr>
@@ -3368,51 +3362,83 @@
             <p:ph type="ctrTitle"/>
           </p:nvPr>
         </p:nvSpPr>
-        <p:spPr/>
+        <p:spPr>
+          <a:xfrm>
+            <a:off x="2116002" y="2030141"/>
+            <a:ext cx="9144000" cy="2064985"/>
+          </a:xfrm>
+        </p:spPr>
         <p:txBody>
           <a:bodyPr>
-            <a:normAutofit fontScale="90000"/>
+            <a:noAutofit/>
           </a:bodyPr>
           <a:lstStyle/>
           <a:p>
             <a:r>
-              <a:rPr lang="ru-RU" sz="4400" dirty="0"/>
+              <a:rPr lang="ru-RU" sz="4000" dirty="0"/>
               <a:t>Разработка приложения для подготовки бухгалтерских форм отчётности</a:t>
             </a:r>
             <a:br>
-              <a:rPr lang="en-US" sz="4400" dirty="0"/>
+              <a:rPr lang="en-US" sz="4000" dirty="0"/>
             </a:br>
-            <a:r>
-              <a:rPr lang="ru-RU" sz="4400" dirty="0"/>
+            <a:endParaRPr lang="ru-RU" sz="4000" dirty="0"/>
+          </a:p>
+        </p:txBody>
+      </p:sp>
+      <p:sp>
+        <p:nvSpPr>
+          <p:cNvPr id="3" name="Подзаголовок 2"/>
+          <p:cNvSpPr>
+            <a:spLocks noGrp="1"/>
+          </p:cNvSpPr>
+          <p:nvPr>
+            <p:ph type="subTitle" idx="1"/>
+          </p:nvPr>
+        </p:nvSpPr>
+        <p:spPr>
+          <a:xfrm>
+            <a:off x="3048000" y="6220178"/>
+            <a:ext cx="8816622" cy="637822"/>
+          </a:xfrm>
+        </p:spPr>
+        <p:txBody>
+          <a:bodyPr/>
+          <a:lstStyle/>
+          <a:p>
+            <a:pPr algn="r"/>
+            <a:r>
+              <a:rPr lang="ru-RU" dirty="0"/>
+              <a:t>Кузнецов Иван 4-ИС-2</a:t>
+            </a:r>
+          </a:p>
+        </p:txBody>
+      </p:sp>
+      <p:sp>
+        <p:nvSpPr>
+          <p:cNvPr id="4" name="TextBox 3"/>
+          <p:cNvSpPr txBox="1"/>
+          <p:nvPr/>
+        </p:nvSpPr>
+        <p:spPr>
+          <a:xfrm>
+            <a:off x="4405232" y="277366"/>
+            <a:ext cx="4565545" cy="1015663"/>
+          </a:xfrm>
+          <a:prstGeom prst="rect">
+            <a:avLst/>
+          </a:prstGeom>
+          <a:noFill/>
+        </p:spPr>
+        <p:txBody>
+          <a:bodyPr wrap="none" rtlCol="0">
+            <a:spAutoFit/>
+          </a:bodyPr>
+          <a:lstStyle/>
+          <a:p>
+            <a:pPr algn="ctr"/>
+            <a:r>
+              <a:rPr lang="ru-RU" sz="6000" dirty="0"/>
               <a:t>ЯО ГПОУ РПК</a:t>
-            </a:r>
-          </a:p>
-        </p:txBody>
-      </p:sp>
-      <p:sp>
-        <p:nvSpPr>
-          <p:cNvPr id="3" name="Subtitle 2">
-            <a:extLst>
-              <a:ext uri="{FF2B5EF4-FFF2-40B4-BE49-F238E27FC236}">
-                <a16:creationId xmlns:a16="http://schemas.microsoft.com/office/drawing/2014/main" id="{3F17EE4A-1A7D-4E4B-877F-3F354BFFCEB7}"/>
-              </a:ext>
-            </a:extLst>
-          </p:cNvPr>
-          <p:cNvSpPr>
-            <a:spLocks noGrp="1"/>
-          </p:cNvSpPr>
-          <p:nvPr>
-            <p:ph type="subTitle" idx="1"/>
-          </p:nvPr>
-        </p:nvSpPr>
-        <p:spPr/>
-        <p:txBody>
-          <a:bodyPr/>
-          <a:lstStyle/>
-          <a:p>
-            <a:r>
-              <a:rPr lang="ru-RU" dirty="0"/>
-              <a:t>Кузнецов Иван</a:t>
             </a:r>
           </a:p>
         </p:txBody>
@@ -3420,7 +3446,7 @@
     </p:spTree>
     <p:extLst>
       <p:ext uri="{BB962C8B-B14F-4D97-AF65-F5344CB8AC3E}">
-        <p14:creationId xmlns:p14="http://schemas.microsoft.com/office/powerpoint/2010/main" val="3333611258"/>
+        <p14:creationId xmlns:p14="http://schemas.microsoft.com/office/powerpoint/2010/main" val="3831834405"/>
       </p:ext>
     </p:extLst>
   </p:cSld>

--- a/files/Записка/Kuznetsov_Ivan_prezentacia.pptx
+++ b/files/Записка/Kuznetsov_Ivan_prezentacia.pptx
@@ -2,7 +2,7 @@
 <file path=ppt/presentation.xml><?xml version="1.0" encoding="utf-8"?>
 <p:presentation xmlns:a="http://schemas.openxmlformats.org/drawingml/2006/main" xmlns:r="http://schemas.openxmlformats.org/officeDocument/2006/relationships" xmlns:p="http://schemas.openxmlformats.org/presentationml/2006/main" saveSubsetFonts="1">
   <p:sldMasterIdLst>
-    <p:sldMasterId id="2147483648" r:id="rId1"/>
+    <p:sldMasterId id="2147483660" r:id="rId1"/>
   </p:sldMasterIdLst>
   <p:sldIdLst>
     <p:sldId id="262" r:id="rId2"/>
@@ -16,9 +16,9 @@
   <p:notesSz cx="6858000" cy="9144000"/>
   <p:defaultTextStyle>
     <a:defPPr>
-      <a:defRPr lang="ru-RU"/>
+      <a:defRPr lang="en-US"/>
     </a:defPPr>
-    <a:lvl1pPr marL="0" algn="l" defTabSz="914400" rtl="0" eaLnBrk="1" latinLnBrk="0" hangingPunct="1">
+    <a:lvl1pPr marL="0" algn="l" defTabSz="457200" rtl="0" eaLnBrk="1" latinLnBrk="0" hangingPunct="1">
       <a:defRPr sz="1800" kern="1200">
         <a:solidFill>
           <a:schemeClr val="tx1"/>
@@ -28,7 +28,7 @@
         <a:cs typeface="+mn-cs"/>
       </a:defRPr>
     </a:lvl1pPr>
-    <a:lvl2pPr marL="457200" algn="l" defTabSz="914400" rtl="0" eaLnBrk="1" latinLnBrk="0" hangingPunct="1">
+    <a:lvl2pPr marL="457200" algn="l" defTabSz="457200" rtl="0" eaLnBrk="1" latinLnBrk="0" hangingPunct="1">
       <a:defRPr sz="1800" kern="1200">
         <a:solidFill>
           <a:schemeClr val="tx1"/>
@@ -38,7 +38,7 @@
         <a:cs typeface="+mn-cs"/>
       </a:defRPr>
     </a:lvl2pPr>
-    <a:lvl3pPr marL="914400" algn="l" defTabSz="914400" rtl="0" eaLnBrk="1" latinLnBrk="0" hangingPunct="1">
+    <a:lvl3pPr marL="914400" algn="l" defTabSz="457200" rtl="0" eaLnBrk="1" latinLnBrk="0" hangingPunct="1">
       <a:defRPr sz="1800" kern="1200">
         <a:solidFill>
           <a:schemeClr val="tx1"/>
@@ -48,7 +48,7 @@
         <a:cs typeface="+mn-cs"/>
       </a:defRPr>
     </a:lvl3pPr>
-    <a:lvl4pPr marL="1371600" algn="l" defTabSz="914400" rtl="0" eaLnBrk="1" latinLnBrk="0" hangingPunct="1">
+    <a:lvl4pPr marL="1371600" algn="l" defTabSz="457200" rtl="0" eaLnBrk="1" latinLnBrk="0" hangingPunct="1">
       <a:defRPr sz="1800" kern="1200">
         <a:solidFill>
           <a:schemeClr val="tx1"/>
@@ -58,7 +58,7 @@
         <a:cs typeface="+mn-cs"/>
       </a:defRPr>
     </a:lvl4pPr>
-    <a:lvl5pPr marL="1828800" algn="l" defTabSz="914400" rtl="0" eaLnBrk="1" latinLnBrk="0" hangingPunct="1">
+    <a:lvl5pPr marL="1828800" algn="l" defTabSz="457200" rtl="0" eaLnBrk="1" latinLnBrk="0" hangingPunct="1">
       <a:defRPr sz="1800" kern="1200">
         <a:solidFill>
           <a:schemeClr val="tx1"/>
@@ -68,7 +68,7 @@
         <a:cs typeface="+mn-cs"/>
       </a:defRPr>
     </a:lvl5pPr>
-    <a:lvl6pPr marL="2286000" algn="l" defTabSz="914400" rtl="0" eaLnBrk="1" latinLnBrk="0" hangingPunct="1">
+    <a:lvl6pPr marL="2286000" algn="l" defTabSz="457200" rtl="0" eaLnBrk="1" latinLnBrk="0" hangingPunct="1">
       <a:defRPr sz="1800" kern="1200">
         <a:solidFill>
           <a:schemeClr val="tx1"/>
@@ -78,7 +78,7 @@
         <a:cs typeface="+mn-cs"/>
       </a:defRPr>
     </a:lvl6pPr>
-    <a:lvl7pPr marL="2743200" algn="l" defTabSz="914400" rtl="0" eaLnBrk="1" latinLnBrk="0" hangingPunct="1">
+    <a:lvl7pPr marL="2743200" algn="l" defTabSz="457200" rtl="0" eaLnBrk="1" latinLnBrk="0" hangingPunct="1">
       <a:defRPr sz="1800" kern="1200">
         <a:solidFill>
           <a:schemeClr val="tx1"/>
@@ -88,7 +88,7 @@
         <a:cs typeface="+mn-cs"/>
       </a:defRPr>
     </a:lvl7pPr>
-    <a:lvl8pPr marL="3200400" algn="l" defTabSz="914400" rtl="0" eaLnBrk="1" latinLnBrk="0" hangingPunct="1">
+    <a:lvl8pPr marL="3200400" algn="l" defTabSz="457200" rtl="0" eaLnBrk="1" latinLnBrk="0" hangingPunct="1">
       <a:defRPr sz="1800" kern="1200">
         <a:solidFill>
           <a:schemeClr val="tx1"/>
@@ -98,7 +98,7 @@
         <a:cs typeface="+mn-cs"/>
       </a:defRPr>
     </a:lvl8pPr>
-    <a:lvl9pPr marL="3657600" algn="l" defTabSz="914400" rtl="0" eaLnBrk="1" latinLnBrk="0" hangingPunct="1">
+    <a:lvl9pPr marL="3657600" algn="l" defTabSz="457200" rtl="0" eaLnBrk="1" latinLnBrk="0" hangingPunct="1">
       <a:defRPr sz="1800" kern="1200">
         <a:solidFill>
           <a:schemeClr val="tx1"/>
@@ -136,31 +136,76 @@
       </p:grpSpPr>
       <p:sp>
         <p:nvSpPr>
-          <p:cNvPr id="2" name="Title 1">
-            <a:extLst>
-              <a:ext uri="{FF2B5EF4-FFF2-40B4-BE49-F238E27FC236}">
-                <a16:creationId xmlns:a16="http://schemas.microsoft.com/office/drawing/2014/main" id="{06064299-DC44-4680-8E02-7C5C8E7C730F}"/>
-              </a:ext>
-            </a:extLst>
-          </p:cNvPr>
-          <p:cNvSpPr>
-            <a:spLocks noGrp="1"/>
-          </p:cNvSpPr>
-          <p:nvPr>
-            <p:ph type="ctrTitle"/>
-          </p:nvPr>
+          <p:cNvPr id="7" name="Rectangle 6"/>
+          <p:cNvSpPr>
+            <a:spLocks noChangeAspect="1"/>
+          </p:cNvSpPr>
+          <p:nvPr/>
         </p:nvSpPr>
         <p:spPr>
           <a:xfrm>
-            <a:off x="1524000" y="1122363"/>
-            <a:ext cx="9144000" cy="2387600"/>
+            <a:off x="231140" y="243840"/>
+            <a:ext cx="11724640" cy="6377939"/>
+          </a:xfrm>
+          <a:prstGeom prst="rect">
+            <a:avLst/>
+          </a:prstGeom>
+          <a:solidFill>
+            <a:schemeClr val="accent1"/>
+          </a:solidFill>
+          <a:ln w="12700">
+            <a:solidFill>
+              <a:srgbClr val="FFFFFF"/>
+            </a:solidFill>
+          </a:ln>
+        </p:spPr>
+        <p:style>
+          <a:lnRef idx="2">
+            <a:schemeClr val="accent1">
+              <a:shade val="50000"/>
+            </a:schemeClr>
+          </a:lnRef>
+          <a:fillRef idx="1">
+            <a:schemeClr val="accent1"/>
+          </a:fillRef>
+          <a:effectRef idx="0">
+            <a:schemeClr val="accent1"/>
+          </a:effectRef>
+          <a:fontRef idx="minor">
+            <a:schemeClr val="lt1"/>
+          </a:fontRef>
+        </p:style>
+      </p:sp>
+      <p:sp>
+        <p:nvSpPr>
+          <p:cNvPr id="2" name="Title 1"/>
+          <p:cNvSpPr>
+            <a:spLocks noGrp="1"/>
+          </p:cNvSpPr>
+          <p:nvPr>
+            <p:ph type="ctrTitle"/>
+          </p:nvPr>
+        </p:nvSpPr>
+        <p:spPr>
+          <a:xfrm>
+            <a:off x="1109980" y="882376"/>
+            <a:ext cx="9966960" cy="2926080"/>
           </a:xfrm>
         </p:spPr>
         <p:txBody>
-          <a:bodyPr anchor="b"/>
+          <a:bodyPr anchor="b">
+            <a:normAutofit/>
+          </a:bodyPr>
           <a:lstStyle>
             <a:lvl1pPr algn="ctr">
-              <a:defRPr sz="6000"/>
+              <a:lnSpc>
+                <a:spcPct val="85000"/>
+              </a:lnSpc>
+              <a:defRPr sz="7200" b="1" cap="all" baseline="0">
+                <a:solidFill>
+                  <a:srgbClr val="FFFFFF"/>
+                </a:solidFill>
+              </a:defRPr>
             </a:lvl1pPr>
           </a:lstStyle>
           <a:p>
@@ -168,19 +213,13 @@
               <a:rPr lang="en-US"/>
               <a:t>Click to edit Master title style</a:t>
             </a:r>
-            <a:endParaRPr lang="ru-RU"/>
-          </a:p>
-        </p:txBody>
-      </p:sp>
-      <p:sp>
-        <p:nvSpPr>
-          <p:cNvPr id="3" name="Subtitle 2">
-            <a:extLst>
-              <a:ext uri="{FF2B5EF4-FFF2-40B4-BE49-F238E27FC236}">
-                <a16:creationId xmlns:a16="http://schemas.microsoft.com/office/drawing/2014/main" id="{8CDCCBF4-3965-452C-8CEB-285F08DF4098}"/>
-              </a:ext>
-            </a:extLst>
-          </p:cNvPr>
+            <a:endParaRPr lang="en-US" dirty="0"/>
+          </a:p>
+        </p:txBody>
+      </p:sp>
+      <p:sp>
+        <p:nvSpPr>
+          <p:cNvPr id="3" name="Subtitle 2"/>
           <p:cNvSpPr>
             <a:spLocks noGrp="1"/>
           </p:cNvSpPr>
@@ -190,48 +229,54 @@
         </p:nvSpPr>
         <p:spPr>
           <a:xfrm>
-            <a:off x="1524000" y="3602038"/>
-            <a:ext cx="9144000" cy="1655762"/>
+            <a:off x="1709530" y="3869634"/>
+            <a:ext cx="8767860" cy="1388165"/>
           </a:xfrm>
         </p:spPr>
         <p:txBody>
-          <a:bodyPr/>
+          <a:bodyPr>
+            <a:normAutofit/>
+          </a:bodyPr>
           <a:lstStyle>
             <a:lvl1pPr marL="0" indent="0" algn="ctr">
               <a:buNone/>
-              <a:defRPr sz="2400"/>
+              <a:defRPr sz="2200">
+                <a:solidFill>
+                  <a:srgbClr val="FFFFFF"/>
+                </a:solidFill>
+              </a:defRPr>
             </a:lvl1pPr>
             <a:lvl2pPr marL="457200" indent="0" algn="ctr">
               <a:buNone/>
-              <a:defRPr sz="2000"/>
+              <a:defRPr sz="2200"/>
             </a:lvl2pPr>
             <a:lvl3pPr marL="914400" indent="0" algn="ctr">
               <a:buNone/>
-              <a:defRPr sz="1800"/>
+              <a:defRPr sz="2200"/>
             </a:lvl3pPr>
             <a:lvl4pPr marL="1371600" indent="0" algn="ctr">
               <a:buNone/>
-              <a:defRPr sz="1600"/>
+              <a:defRPr sz="2000"/>
             </a:lvl4pPr>
             <a:lvl5pPr marL="1828800" indent="0" algn="ctr">
               <a:buNone/>
-              <a:defRPr sz="1600"/>
+              <a:defRPr sz="2000"/>
             </a:lvl5pPr>
             <a:lvl6pPr marL="2286000" indent="0" algn="ctr">
               <a:buNone/>
-              <a:defRPr sz="1600"/>
+              <a:defRPr sz="2000"/>
             </a:lvl6pPr>
             <a:lvl7pPr marL="2743200" indent="0" algn="ctr">
               <a:buNone/>
-              <a:defRPr sz="1600"/>
+              <a:defRPr sz="2000"/>
             </a:lvl7pPr>
             <a:lvl8pPr marL="3200400" indent="0" algn="ctr">
               <a:buNone/>
-              <a:defRPr sz="1600"/>
+              <a:defRPr sz="2000"/>
             </a:lvl8pPr>
             <a:lvl9pPr marL="3657600" indent="0" algn="ctr">
               <a:buNone/>
-              <a:defRPr sz="1600"/>
+              <a:defRPr sz="2000"/>
             </a:lvl9pPr>
           </a:lstStyle>
           <a:p>
@@ -239,19 +284,13 @@
               <a:rPr lang="en-US"/>
               <a:t>Click to edit Master subtitle style</a:t>
             </a:r>
-            <a:endParaRPr lang="ru-RU"/>
-          </a:p>
-        </p:txBody>
-      </p:sp>
-      <p:sp>
-        <p:nvSpPr>
-          <p:cNvPr id="4" name="Date Placeholder 3">
-            <a:extLst>
-              <a:ext uri="{FF2B5EF4-FFF2-40B4-BE49-F238E27FC236}">
-                <a16:creationId xmlns:a16="http://schemas.microsoft.com/office/drawing/2014/main" id="{EFB98E61-9365-439D-80D6-F205E8859BDB}"/>
-              </a:ext>
-            </a:extLst>
-          </p:cNvPr>
+            <a:endParaRPr lang="en-US" dirty="0"/>
+          </a:p>
+        </p:txBody>
+      </p:sp>
+      <p:sp>
+        <p:nvSpPr>
+          <p:cNvPr id="4" name="Date Placeholder 3"/>
           <p:cNvSpPr>
             <a:spLocks noGrp="1"/>
           </p:cNvSpPr>
@@ -262,11 +301,19 @@
         <p:spPr/>
         <p:txBody>
           <a:bodyPr/>
-          <a:lstStyle/>
+          <a:lstStyle>
+            <a:lvl1pPr>
+              <a:defRPr>
+                <a:solidFill>
+                  <a:srgbClr val="FFFFFF"/>
+                </a:solidFill>
+              </a:defRPr>
+            </a:lvl1pPr>
+          </a:lstStyle>
           <a:p>
             <a:fld id="{1A670E6B-6FFF-4C4E-911D-FC811DD883A8}" type="datetimeFigureOut">
               <a:rPr lang="ru-RU" smtClean="0"/>
-              <a:t>16.06.2023</a:t>
+              <a:t>21.06.2023</a:t>
             </a:fld>
             <a:endParaRPr lang="ru-RU"/>
           </a:p>
@@ -274,13 +321,7 @@
       </p:sp>
       <p:sp>
         <p:nvSpPr>
-          <p:cNvPr id="5" name="Footer Placeholder 4">
-            <a:extLst>
-              <a:ext uri="{FF2B5EF4-FFF2-40B4-BE49-F238E27FC236}">
-                <a16:creationId xmlns:a16="http://schemas.microsoft.com/office/drawing/2014/main" id="{375E8558-F79D-423E-B29A-E25F4F08C015}"/>
-              </a:ext>
-            </a:extLst>
-          </p:cNvPr>
+          <p:cNvPr id="5" name="Footer Placeholder 4"/>
           <p:cNvSpPr>
             <a:spLocks noGrp="1"/>
           </p:cNvSpPr>
@@ -291,7 +332,15 @@
         <p:spPr/>
         <p:txBody>
           <a:bodyPr/>
-          <a:lstStyle/>
+          <a:lstStyle>
+            <a:lvl1pPr>
+              <a:defRPr>
+                <a:solidFill>
+                  <a:srgbClr val="FFFFFF"/>
+                </a:solidFill>
+              </a:defRPr>
+            </a:lvl1pPr>
+          </a:lstStyle>
           <a:p>
             <a:endParaRPr lang="ru-RU"/>
           </a:p>
@@ -299,13 +348,7 @@
       </p:sp>
       <p:sp>
         <p:nvSpPr>
-          <p:cNvPr id="6" name="Slide Number Placeholder 5">
-            <a:extLst>
-              <a:ext uri="{FF2B5EF4-FFF2-40B4-BE49-F238E27FC236}">
-                <a16:creationId xmlns:a16="http://schemas.microsoft.com/office/drawing/2014/main" id="{BB3C8026-0D89-44B6-AAFC-60E31941E6D6}"/>
-              </a:ext>
-            </a:extLst>
-          </p:cNvPr>
+          <p:cNvPr id="6" name="Slide Number Placeholder 5"/>
           <p:cNvSpPr>
             <a:spLocks noGrp="1"/>
           </p:cNvSpPr>
@@ -316,7 +359,15 @@
         <p:spPr/>
         <p:txBody>
           <a:bodyPr/>
-          <a:lstStyle/>
+          <a:lstStyle>
+            <a:lvl1pPr>
+              <a:defRPr>
+                <a:solidFill>
+                  <a:srgbClr val="FFFFFF"/>
+                </a:solidFill>
+              </a:defRPr>
+            </a:lvl1pPr>
+          </a:lstStyle>
           <a:p>
             <a:fld id="{1E56EF5C-F2FD-4EE7-B9BF-4B60DBBE11B4}" type="slidenum">
               <a:rPr lang="ru-RU" smtClean="0"/>
@@ -326,10 +377,45 @@
           </a:p>
         </p:txBody>
       </p:sp>
+      <p:cxnSp>
+        <p:nvCxnSpPr>
+          <p:cNvPr id="8" name="Straight Connector 7"/>
+          <p:cNvCxnSpPr/>
+          <p:nvPr/>
+        </p:nvCxnSpPr>
+        <p:spPr>
+          <a:xfrm>
+            <a:off x="1978660" y="3733800"/>
+            <a:ext cx="8229601" cy="0"/>
+          </a:xfrm>
+          <a:prstGeom prst="line">
+            <a:avLst/>
+          </a:prstGeom>
+          <a:ln>
+            <a:solidFill>
+              <a:srgbClr val="FFFFFF"/>
+            </a:solidFill>
+          </a:ln>
+        </p:spPr>
+        <p:style>
+          <a:lnRef idx="1">
+            <a:schemeClr val="accent1"/>
+          </a:lnRef>
+          <a:fillRef idx="0">
+            <a:schemeClr val="accent1"/>
+          </a:fillRef>
+          <a:effectRef idx="0">
+            <a:schemeClr val="accent1"/>
+          </a:effectRef>
+          <a:fontRef idx="minor">
+            <a:schemeClr val="tx1"/>
+          </a:fontRef>
+        </p:style>
+      </p:cxnSp>
     </p:spTree>
     <p:extLst>
       <p:ext uri="{BB962C8B-B14F-4D97-AF65-F5344CB8AC3E}">
-        <p14:creationId xmlns:p14="http://schemas.microsoft.com/office/powerpoint/2010/main" val="2629896859"/>
+        <p14:creationId xmlns:p14="http://schemas.microsoft.com/office/powerpoint/2010/main" val="2678198177"/>
       </p:ext>
     </p:extLst>
   </p:cSld>
@@ -358,13 +444,7 @@
       </p:grpSpPr>
       <p:sp>
         <p:nvSpPr>
-          <p:cNvPr id="2" name="Title 1">
-            <a:extLst>
-              <a:ext uri="{FF2B5EF4-FFF2-40B4-BE49-F238E27FC236}">
-                <a16:creationId xmlns:a16="http://schemas.microsoft.com/office/drawing/2014/main" id="{F95C9826-BC7E-4181-9C89-A612684D6D25}"/>
-              </a:ext>
-            </a:extLst>
-          </p:cNvPr>
+          <p:cNvPr id="2" name="Title 1"/>
           <p:cNvSpPr>
             <a:spLocks noGrp="1"/>
           </p:cNvSpPr>
@@ -381,19 +461,13 @@
               <a:rPr lang="en-US"/>
               <a:t>Click to edit Master title style</a:t>
             </a:r>
-            <a:endParaRPr lang="ru-RU"/>
-          </a:p>
-        </p:txBody>
-      </p:sp>
-      <p:sp>
-        <p:nvSpPr>
-          <p:cNvPr id="3" name="Vertical Text Placeholder 2">
-            <a:extLst>
-              <a:ext uri="{FF2B5EF4-FFF2-40B4-BE49-F238E27FC236}">
-                <a16:creationId xmlns:a16="http://schemas.microsoft.com/office/drawing/2014/main" id="{56BCD23B-E5E9-4007-A73D-F28C54BFC1D3}"/>
-              </a:ext>
-            </a:extLst>
-          </p:cNvPr>
+            <a:endParaRPr lang="en-US" dirty="0"/>
+          </a:p>
+        </p:txBody>
+      </p:sp>
+      <p:sp>
+        <p:nvSpPr>
+          <p:cNvPr id="3" name="Vertical Text Placeholder 2"/>
           <p:cNvSpPr>
             <a:spLocks noGrp="1"/>
           </p:cNvSpPr>
@@ -439,19 +513,13 @@
               <a:rPr lang="en-US"/>
               <a:t>Fifth level</a:t>
             </a:r>
-            <a:endParaRPr lang="ru-RU"/>
-          </a:p>
-        </p:txBody>
-      </p:sp>
-      <p:sp>
-        <p:nvSpPr>
-          <p:cNvPr id="4" name="Date Placeholder 3">
-            <a:extLst>
-              <a:ext uri="{FF2B5EF4-FFF2-40B4-BE49-F238E27FC236}">
-                <a16:creationId xmlns:a16="http://schemas.microsoft.com/office/drawing/2014/main" id="{B99AFD9B-EC35-4D5A-B4AC-CFD6FDCC2695}"/>
-              </a:ext>
-            </a:extLst>
-          </p:cNvPr>
+            <a:endParaRPr lang="en-US" dirty="0"/>
+          </a:p>
+        </p:txBody>
+      </p:sp>
+      <p:sp>
+        <p:nvSpPr>
+          <p:cNvPr id="4" name="Date Placeholder 3"/>
           <p:cNvSpPr>
             <a:spLocks noGrp="1"/>
           </p:cNvSpPr>
@@ -466,7 +534,7 @@
           <a:p>
             <a:fld id="{1A670E6B-6FFF-4C4E-911D-FC811DD883A8}" type="datetimeFigureOut">
               <a:rPr lang="ru-RU" smtClean="0"/>
-              <a:t>16.06.2023</a:t>
+              <a:t>21.06.2023</a:t>
             </a:fld>
             <a:endParaRPr lang="ru-RU"/>
           </a:p>
@@ -474,13 +542,7 @@
       </p:sp>
       <p:sp>
         <p:nvSpPr>
-          <p:cNvPr id="5" name="Footer Placeholder 4">
-            <a:extLst>
-              <a:ext uri="{FF2B5EF4-FFF2-40B4-BE49-F238E27FC236}">
-                <a16:creationId xmlns:a16="http://schemas.microsoft.com/office/drawing/2014/main" id="{7D8D6F35-E090-4206-9996-68B2273B46C7}"/>
-              </a:ext>
-            </a:extLst>
-          </p:cNvPr>
+          <p:cNvPr id="5" name="Footer Placeholder 4"/>
           <p:cNvSpPr>
             <a:spLocks noGrp="1"/>
           </p:cNvSpPr>
@@ -499,13 +561,7 @@
       </p:sp>
       <p:sp>
         <p:nvSpPr>
-          <p:cNvPr id="6" name="Slide Number Placeholder 5">
-            <a:extLst>
-              <a:ext uri="{FF2B5EF4-FFF2-40B4-BE49-F238E27FC236}">
-                <a16:creationId xmlns:a16="http://schemas.microsoft.com/office/drawing/2014/main" id="{46ADF700-5BB4-4263-BAC0-B5F59420168F}"/>
-              </a:ext>
-            </a:extLst>
-          </p:cNvPr>
+          <p:cNvPr id="6" name="Slide Number Placeholder 5"/>
           <p:cNvSpPr>
             <a:spLocks noGrp="1"/>
           </p:cNvSpPr>
@@ -529,7 +585,7 @@
     </p:spTree>
     <p:extLst>
       <p:ext uri="{BB962C8B-B14F-4D97-AF65-F5344CB8AC3E}">
-        <p14:creationId xmlns:p14="http://schemas.microsoft.com/office/powerpoint/2010/main" val="2773250330"/>
+        <p14:creationId xmlns:p14="http://schemas.microsoft.com/office/powerpoint/2010/main" val="2063022770"/>
       </p:ext>
     </p:extLst>
   </p:cSld>
@@ -558,13 +614,7 @@
       </p:grpSpPr>
       <p:sp>
         <p:nvSpPr>
-          <p:cNvPr id="2" name="Vertical Title 1">
-            <a:extLst>
-              <a:ext uri="{FF2B5EF4-FFF2-40B4-BE49-F238E27FC236}">
-                <a16:creationId xmlns:a16="http://schemas.microsoft.com/office/drawing/2014/main" id="{7BC3137A-176A-44B4-8BCE-5E7EECAF03AE}"/>
-              </a:ext>
-            </a:extLst>
-          </p:cNvPr>
+          <p:cNvPr id="2" name="Vertical Title 1"/>
           <p:cNvSpPr>
             <a:spLocks noGrp="1"/>
           </p:cNvSpPr>
@@ -574,8 +624,8 @@
         </p:nvSpPr>
         <p:spPr>
           <a:xfrm>
-            <a:off x="8724900" y="365125"/>
-            <a:ext cx="2628900" cy="5811838"/>
+            <a:off x="8724900" y="762000"/>
+            <a:ext cx="2324100" cy="5410200"/>
           </a:xfrm>
         </p:spPr>
         <p:txBody>
@@ -586,19 +636,13 @@
               <a:rPr lang="en-US"/>
               <a:t>Click to edit Master title style</a:t>
             </a:r>
-            <a:endParaRPr lang="ru-RU"/>
-          </a:p>
-        </p:txBody>
-      </p:sp>
-      <p:sp>
-        <p:nvSpPr>
-          <p:cNvPr id="3" name="Vertical Text Placeholder 2">
-            <a:extLst>
-              <a:ext uri="{FF2B5EF4-FFF2-40B4-BE49-F238E27FC236}">
-                <a16:creationId xmlns:a16="http://schemas.microsoft.com/office/drawing/2014/main" id="{5953CCE4-6812-4442-9BF7-B5DD78B6B65C}"/>
-              </a:ext>
-            </a:extLst>
-          </p:cNvPr>
+            <a:endParaRPr lang="en-US" dirty="0"/>
+          </a:p>
+        </p:txBody>
+      </p:sp>
+      <p:sp>
+        <p:nvSpPr>
+          <p:cNvPr id="3" name="Vertical Text Placeholder 2"/>
           <p:cNvSpPr>
             <a:spLocks noGrp="1"/>
           </p:cNvSpPr>
@@ -608,8 +652,8 @@
         </p:nvSpPr>
         <p:spPr>
           <a:xfrm>
-            <a:off x="838200" y="365125"/>
-            <a:ext cx="7734300" cy="5811838"/>
+            <a:off x="1143000" y="762000"/>
+            <a:ext cx="7429500" cy="5410200"/>
           </a:xfrm>
         </p:spPr>
         <p:txBody>
@@ -649,19 +693,13 @@
               <a:rPr lang="en-US"/>
               <a:t>Fifth level</a:t>
             </a:r>
-            <a:endParaRPr lang="ru-RU"/>
-          </a:p>
-        </p:txBody>
-      </p:sp>
-      <p:sp>
-        <p:nvSpPr>
-          <p:cNvPr id="4" name="Date Placeholder 3">
-            <a:extLst>
-              <a:ext uri="{FF2B5EF4-FFF2-40B4-BE49-F238E27FC236}">
-                <a16:creationId xmlns:a16="http://schemas.microsoft.com/office/drawing/2014/main" id="{582C776C-913A-46D5-9355-826062B55D95}"/>
-              </a:ext>
-            </a:extLst>
-          </p:cNvPr>
+            <a:endParaRPr lang="en-US" dirty="0"/>
+          </a:p>
+        </p:txBody>
+      </p:sp>
+      <p:sp>
+        <p:nvSpPr>
+          <p:cNvPr id="4" name="Date Placeholder 3"/>
           <p:cNvSpPr>
             <a:spLocks noGrp="1"/>
           </p:cNvSpPr>
@@ -676,7 +714,7 @@
           <a:p>
             <a:fld id="{1A670E6B-6FFF-4C4E-911D-FC811DD883A8}" type="datetimeFigureOut">
               <a:rPr lang="ru-RU" smtClean="0"/>
-              <a:t>16.06.2023</a:t>
+              <a:t>21.06.2023</a:t>
             </a:fld>
             <a:endParaRPr lang="ru-RU"/>
           </a:p>
@@ -684,13 +722,7 @@
       </p:sp>
       <p:sp>
         <p:nvSpPr>
-          <p:cNvPr id="5" name="Footer Placeholder 4">
-            <a:extLst>
-              <a:ext uri="{FF2B5EF4-FFF2-40B4-BE49-F238E27FC236}">
-                <a16:creationId xmlns:a16="http://schemas.microsoft.com/office/drawing/2014/main" id="{063FB478-CA43-4100-9BF5-B31137ABD5EA}"/>
-              </a:ext>
-            </a:extLst>
-          </p:cNvPr>
+          <p:cNvPr id="5" name="Footer Placeholder 4"/>
           <p:cNvSpPr>
             <a:spLocks noGrp="1"/>
           </p:cNvSpPr>
@@ -709,13 +741,7 @@
       </p:sp>
       <p:sp>
         <p:nvSpPr>
-          <p:cNvPr id="6" name="Slide Number Placeholder 5">
-            <a:extLst>
-              <a:ext uri="{FF2B5EF4-FFF2-40B4-BE49-F238E27FC236}">
-                <a16:creationId xmlns:a16="http://schemas.microsoft.com/office/drawing/2014/main" id="{F37A333F-5A6E-43BD-9EB1-0181BCF37CC6}"/>
-              </a:ext>
-            </a:extLst>
-          </p:cNvPr>
+          <p:cNvPr id="6" name="Slide Number Placeholder 5"/>
           <p:cNvSpPr>
             <a:spLocks noGrp="1"/>
           </p:cNvSpPr>
@@ -739,7 +765,7 @@
     </p:spTree>
     <p:extLst>
       <p:ext uri="{BB962C8B-B14F-4D97-AF65-F5344CB8AC3E}">
-        <p14:creationId xmlns:p14="http://schemas.microsoft.com/office/powerpoint/2010/main" val="248509216"/>
+        <p14:creationId xmlns:p14="http://schemas.microsoft.com/office/powerpoint/2010/main" val="3757421366"/>
       </p:ext>
     </p:extLst>
   </p:cSld>
@@ -768,13 +794,7 @@
       </p:grpSpPr>
       <p:sp>
         <p:nvSpPr>
-          <p:cNvPr id="2" name="Title 1">
-            <a:extLst>
-              <a:ext uri="{FF2B5EF4-FFF2-40B4-BE49-F238E27FC236}">
-                <a16:creationId xmlns:a16="http://schemas.microsoft.com/office/drawing/2014/main" id="{17D4E015-F7AA-4551-9DFF-54DFF1CD7875}"/>
-              </a:ext>
-            </a:extLst>
-          </p:cNvPr>
+          <p:cNvPr id="2" name="Title 1"/>
           <p:cNvSpPr>
             <a:spLocks noGrp="1"/>
           </p:cNvSpPr>
@@ -791,19 +811,13 @@
               <a:rPr lang="en-US"/>
               <a:t>Click to edit Master title style</a:t>
             </a:r>
-            <a:endParaRPr lang="ru-RU"/>
-          </a:p>
-        </p:txBody>
-      </p:sp>
-      <p:sp>
-        <p:nvSpPr>
-          <p:cNvPr id="3" name="Content Placeholder 2">
-            <a:extLst>
-              <a:ext uri="{FF2B5EF4-FFF2-40B4-BE49-F238E27FC236}">
-                <a16:creationId xmlns:a16="http://schemas.microsoft.com/office/drawing/2014/main" id="{1827B4C0-5B11-4C85-AE8D-6ACF55E8A54A}"/>
-              </a:ext>
-            </a:extLst>
-          </p:cNvPr>
+            <a:endParaRPr lang="en-US" dirty="0"/>
+          </a:p>
+        </p:txBody>
+      </p:sp>
+      <p:sp>
+        <p:nvSpPr>
+          <p:cNvPr id="3" name="Content Placeholder 2"/>
           <p:cNvSpPr>
             <a:spLocks noGrp="1"/>
           </p:cNvSpPr>
@@ -849,19 +863,13 @@
               <a:rPr lang="en-US"/>
               <a:t>Fifth level</a:t>
             </a:r>
-            <a:endParaRPr lang="ru-RU"/>
-          </a:p>
-        </p:txBody>
-      </p:sp>
-      <p:sp>
-        <p:nvSpPr>
-          <p:cNvPr id="4" name="Date Placeholder 3">
-            <a:extLst>
-              <a:ext uri="{FF2B5EF4-FFF2-40B4-BE49-F238E27FC236}">
-                <a16:creationId xmlns:a16="http://schemas.microsoft.com/office/drawing/2014/main" id="{AD5EB32A-4D21-478F-A37B-3F55ABDACA0B}"/>
-              </a:ext>
-            </a:extLst>
-          </p:cNvPr>
+            <a:endParaRPr lang="en-US" dirty="0"/>
+          </a:p>
+        </p:txBody>
+      </p:sp>
+      <p:sp>
+        <p:nvSpPr>
+          <p:cNvPr id="4" name="Date Placeholder 3"/>
           <p:cNvSpPr>
             <a:spLocks noGrp="1"/>
           </p:cNvSpPr>
@@ -876,7 +884,7 @@
           <a:p>
             <a:fld id="{1A670E6B-6FFF-4C4E-911D-FC811DD883A8}" type="datetimeFigureOut">
               <a:rPr lang="ru-RU" smtClean="0"/>
-              <a:t>16.06.2023</a:t>
+              <a:t>21.06.2023</a:t>
             </a:fld>
             <a:endParaRPr lang="ru-RU"/>
           </a:p>
@@ -884,13 +892,7 @@
       </p:sp>
       <p:sp>
         <p:nvSpPr>
-          <p:cNvPr id="5" name="Footer Placeholder 4">
-            <a:extLst>
-              <a:ext uri="{FF2B5EF4-FFF2-40B4-BE49-F238E27FC236}">
-                <a16:creationId xmlns:a16="http://schemas.microsoft.com/office/drawing/2014/main" id="{C529547A-2C49-4BAC-863B-21455916C6ED}"/>
-              </a:ext>
-            </a:extLst>
-          </p:cNvPr>
+          <p:cNvPr id="5" name="Footer Placeholder 4"/>
           <p:cNvSpPr>
             <a:spLocks noGrp="1"/>
           </p:cNvSpPr>
@@ -909,13 +911,7 @@
       </p:sp>
       <p:sp>
         <p:nvSpPr>
-          <p:cNvPr id="6" name="Slide Number Placeholder 5">
-            <a:extLst>
-              <a:ext uri="{FF2B5EF4-FFF2-40B4-BE49-F238E27FC236}">
-                <a16:creationId xmlns:a16="http://schemas.microsoft.com/office/drawing/2014/main" id="{40A6535B-C4FF-44F8-9047-521F68275BB9}"/>
-              </a:ext>
-            </a:extLst>
-          </p:cNvPr>
+          <p:cNvPr id="6" name="Slide Number Placeholder 5"/>
           <p:cNvSpPr>
             <a:spLocks noGrp="1"/>
           </p:cNvSpPr>
@@ -939,7 +935,7 @@
     </p:spTree>
     <p:extLst>
       <p:ext uri="{BB962C8B-B14F-4D97-AF65-F5344CB8AC3E}">
-        <p14:creationId xmlns:p14="http://schemas.microsoft.com/office/powerpoint/2010/main" val="2786112924"/>
+        <p14:creationId xmlns:p14="http://schemas.microsoft.com/office/powerpoint/2010/main" val="3595450928"/>
       </p:ext>
     </p:extLst>
   </p:cSld>
@@ -968,13 +964,7 @@
       </p:grpSpPr>
       <p:sp>
         <p:nvSpPr>
-          <p:cNvPr id="2" name="Title 1">
-            <a:extLst>
-              <a:ext uri="{FF2B5EF4-FFF2-40B4-BE49-F238E27FC236}">
-                <a16:creationId xmlns:a16="http://schemas.microsoft.com/office/drawing/2014/main" id="{442F9145-9CBC-44B7-BCA0-F0679A3AB1B5}"/>
-              </a:ext>
-            </a:extLst>
-          </p:cNvPr>
+          <p:cNvPr id="2" name="Title 1"/>
           <p:cNvSpPr>
             <a:spLocks noGrp="1"/>
           </p:cNvSpPr>
@@ -984,15 +974,20 @@
         </p:nvSpPr>
         <p:spPr>
           <a:xfrm>
-            <a:off x="831850" y="1709738"/>
-            <a:ext cx="10515600" cy="2852737"/>
+            <a:off x="1106424" y="1173575"/>
+            <a:ext cx="9966960" cy="2926080"/>
           </a:xfrm>
         </p:spPr>
         <p:txBody>
-          <a:bodyPr anchor="b"/>
+          <a:bodyPr anchor="b">
+            <a:noAutofit/>
+          </a:bodyPr>
           <a:lstStyle>
-            <a:lvl1pPr>
-              <a:defRPr sz="6000"/>
+            <a:lvl1pPr algn="ctr">
+              <a:lnSpc>
+                <a:spcPct val="85000"/>
+              </a:lnSpc>
+              <a:defRPr sz="7200" b="0" cap="all" baseline="0"/>
             </a:lvl1pPr>
           </a:lstStyle>
           <a:p>
@@ -1000,19 +995,13 @@
               <a:rPr lang="en-US"/>
               <a:t>Click to edit Master title style</a:t>
             </a:r>
-            <a:endParaRPr lang="ru-RU"/>
-          </a:p>
-        </p:txBody>
-      </p:sp>
-      <p:sp>
-        <p:nvSpPr>
-          <p:cNvPr id="3" name="Text Placeholder 2">
-            <a:extLst>
-              <a:ext uri="{FF2B5EF4-FFF2-40B4-BE49-F238E27FC236}">
-                <a16:creationId xmlns:a16="http://schemas.microsoft.com/office/drawing/2014/main" id="{0B3BB1CD-CDB9-499F-BF98-C31AE7A958FA}"/>
-              </a:ext>
-            </a:extLst>
-          </p:cNvPr>
+            <a:endParaRPr lang="en-US" dirty="0"/>
+          </a:p>
+        </p:txBody>
+      </p:sp>
+      <p:sp>
+        <p:nvSpPr>
+          <p:cNvPr id="3" name="Text Placeholder 2"/>
           <p:cNvSpPr>
             <a:spLocks noGrp="1"/>
           </p:cNvSpPr>
@@ -1022,26 +1011,26 @@
         </p:nvSpPr>
         <p:spPr>
           <a:xfrm>
-            <a:off x="831850" y="4589463"/>
-            <a:ext cx="10515600" cy="1500187"/>
+            <a:off x="1709928" y="4154520"/>
+            <a:ext cx="8769096" cy="1363806"/>
           </a:xfrm>
         </p:spPr>
         <p:txBody>
-          <a:bodyPr/>
+          <a:bodyPr anchor="t">
+            <a:normAutofit/>
+          </a:bodyPr>
           <a:lstStyle>
-            <a:lvl1pPr marL="0" indent="0">
-              <a:buNone/>
-              <a:defRPr sz="2400">
+            <a:lvl1pPr marL="0" indent="0" algn="ctr">
+              <a:buNone/>
+              <a:defRPr sz="2200">
                 <a:solidFill>
-                  <a:schemeClr val="tx1">
-                    <a:tint val="75000"/>
-                  </a:schemeClr>
+                  <a:schemeClr val="accent1"/>
                 </a:solidFill>
               </a:defRPr>
             </a:lvl1pPr>
             <a:lvl2pPr marL="457200" indent="0">
               <a:buNone/>
-              <a:defRPr sz="2000">
+              <a:defRPr sz="1800">
                 <a:solidFill>
                   <a:schemeClr val="tx1">
                     <a:tint val="75000"/>
@@ -1051,7 +1040,7 @@
             </a:lvl2pPr>
             <a:lvl3pPr marL="914400" indent="0">
               <a:buNone/>
-              <a:defRPr sz="1800">
+              <a:defRPr sz="1600">
                 <a:solidFill>
                   <a:schemeClr val="tx1">
                     <a:tint val="75000"/>
@@ -1061,7 +1050,7 @@
             </a:lvl3pPr>
             <a:lvl4pPr marL="1371600" indent="0">
               <a:buNone/>
-              <a:defRPr sz="1600">
+              <a:defRPr sz="1400">
                 <a:solidFill>
                   <a:schemeClr val="tx1">
                     <a:tint val="75000"/>
@@ -1071,7 +1060,7 @@
             </a:lvl4pPr>
             <a:lvl5pPr marL="1828800" indent="0">
               <a:buNone/>
-              <a:defRPr sz="1600">
+              <a:defRPr sz="1400">
                 <a:solidFill>
                   <a:schemeClr val="tx1">
                     <a:tint val="75000"/>
@@ -1081,7 +1070,7 @@
             </a:lvl5pPr>
             <a:lvl6pPr marL="2286000" indent="0">
               <a:buNone/>
-              <a:defRPr sz="1600">
+              <a:defRPr sz="1400">
                 <a:solidFill>
                   <a:schemeClr val="tx1">
                     <a:tint val="75000"/>
@@ -1091,7 +1080,7 @@
             </a:lvl6pPr>
             <a:lvl7pPr marL="2743200" indent="0">
               <a:buNone/>
-              <a:defRPr sz="1600">
+              <a:defRPr sz="1400">
                 <a:solidFill>
                   <a:schemeClr val="tx1">
                     <a:tint val="75000"/>
@@ -1101,7 +1090,7 @@
             </a:lvl7pPr>
             <a:lvl8pPr marL="3200400" indent="0">
               <a:buNone/>
-              <a:defRPr sz="1600">
+              <a:defRPr sz="1400">
                 <a:solidFill>
                   <a:schemeClr val="tx1">
                     <a:tint val="75000"/>
@@ -1111,7 +1100,7 @@
             </a:lvl8pPr>
             <a:lvl9pPr marL="3657600" indent="0">
               <a:buNone/>
-              <a:defRPr sz="1600">
+              <a:defRPr sz="1400">
                 <a:solidFill>
                   <a:schemeClr val="tx1">
                     <a:tint val="75000"/>
@@ -1131,13 +1120,7 @@
       </p:sp>
       <p:sp>
         <p:nvSpPr>
-          <p:cNvPr id="4" name="Date Placeholder 3">
-            <a:extLst>
-              <a:ext uri="{FF2B5EF4-FFF2-40B4-BE49-F238E27FC236}">
-                <a16:creationId xmlns:a16="http://schemas.microsoft.com/office/drawing/2014/main" id="{C2AAE022-B27A-44F5-BF60-D8CC0197984D}"/>
-              </a:ext>
-            </a:extLst>
-          </p:cNvPr>
+          <p:cNvPr id="4" name="Date Placeholder 3"/>
           <p:cNvSpPr>
             <a:spLocks noGrp="1"/>
           </p:cNvSpPr>
@@ -1152,7 +1135,7 @@
           <a:p>
             <a:fld id="{1A670E6B-6FFF-4C4E-911D-FC811DD883A8}" type="datetimeFigureOut">
               <a:rPr lang="ru-RU" smtClean="0"/>
-              <a:t>16.06.2023</a:t>
+              <a:t>21.06.2023</a:t>
             </a:fld>
             <a:endParaRPr lang="ru-RU"/>
           </a:p>
@@ -1160,13 +1143,7 @@
       </p:sp>
       <p:sp>
         <p:nvSpPr>
-          <p:cNvPr id="5" name="Footer Placeholder 4">
-            <a:extLst>
-              <a:ext uri="{FF2B5EF4-FFF2-40B4-BE49-F238E27FC236}">
-                <a16:creationId xmlns:a16="http://schemas.microsoft.com/office/drawing/2014/main" id="{65C08703-1DD5-40A8-9F4A-496FF19E4400}"/>
-              </a:ext>
-            </a:extLst>
-          </p:cNvPr>
+          <p:cNvPr id="5" name="Footer Placeholder 4"/>
           <p:cNvSpPr>
             <a:spLocks noGrp="1"/>
           </p:cNvSpPr>
@@ -1185,13 +1162,7 @@
       </p:sp>
       <p:sp>
         <p:nvSpPr>
-          <p:cNvPr id="6" name="Slide Number Placeholder 5">
-            <a:extLst>
-              <a:ext uri="{FF2B5EF4-FFF2-40B4-BE49-F238E27FC236}">
-                <a16:creationId xmlns:a16="http://schemas.microsoft.com/office/drawing/2014/main" id="{387ADD5C-E0C8-49AF-9B45-DE36CDF6F8EA}"/>
-              </a:ext>
-            </a:extLst>
-          </p:cNvPr>
+          <p:cNvPr id="6" name="Slide Number Placeholder 5"/>
           <p:cNvSpPr>
             <a:spLocks noGrp="1"/>
           </p:cNvSpPr>
@@ -1212,10 +1183,45 @@
           </a:p>
         </p:txBody>
       </p:sp>
+      <p:cxnSp>
+        <p:nvCxnSpPr>
+          <p:cNvPr id="7" name="Straight Connector 6"/>
+          <p:cNvCxnSpPr/>
+          <p:nvPr/>
+        </p:nvCxnSpPr>
+        <p:spPr>
+          <a:xfrm>
+            <a:off x="1981200" y="4020408"/>
+            <a:ext cx="8229601" cy="0"/>
+          </a:xfrm>
+          <a:prstGeom prst="line">
+            <a:avLst/>
+          </a:prstGeom>
+          <a:ln>
+            <a:solidFill>
+              <a:schemeClr val="accent1"/>
+            </a:solidFill>
+          </a:ln>
+        </p:spPr>
+        <p:style>
+          <a:lnRef idx="1">
+            <a:schemeClr val="accent1"/>
+          </a:lnRef>
+          <a:fillRef idx="0">
+            <a:schemeClr val="accent1"/>
+          </a:fillRef>
+          <a:effectRef idx="0">
+            <a:schemeClr val="accent1"/>
+          </a:effectRef>
+          <a:fontRef idx="minor">
+            <a:schemeClr val="tx1"/>
+          </a:fontRef>
+        </p:style>
+      </p:cxnSp>
     </p:spTree>
     <p:extLst>
       <p:ext uri="{BB962C8B-B14F-4D97-AF65-F5344CB8AC3E}">
-        <p14:creationId xmlns:p14="http://schemas.microsoft.com/office/powerpoint/2010/main" val="879322535"/>
+        <p14:creationId xmlns:p14="http://schemas.microsoft.com/office/powerpoint/2010/main" val="176291288"/>
       </p:ext>
     </p:extLst>
   </p:cSld>
@@ -1244,13 +1250,7 @@
       </p:grpSpPr>
       <p:sp>
         <p:nvSpPr>
-          <p:cNvPr id="2" name="Title 1">
-            <a:extLst>
-              <a:ext uri="{FF2B5EF4-FFF2-40B4-BE49-F238E27FC236}">
-                <a16:creationId xmlns:a16="http://schemas.microsoft.com/office/drawing/2014/main" id="{BF2A40E3-0D69-415A-B7D2-09E994A49859}"/>
-              </a:ext>
-            </a:extLst>
-          </p:cNvPr>
+          <p:cNvPr id="8" name="Title 7"/>
           <p:cNvSpPr>
             <a:spLocks noGrp="1"/>
           </p:cNvSpPr>
@@ -1267,19 +1267,13 @@
               <a:rPr lang="en-US"/>
               <a:t>Click to edit Master title style</a:t>
             </a:r>
-            <a:endParaRPr lang="ru-RU"/>
-          </a:p>
-        </p:txBody>
-      </p:sp>
-      <p:sp>
-        <p:nvSpPr>
-          <p:cNvPr id="3" name="Content Placeholder 2">
-            <a:extLst>
-              <a:ext uri="{FF2B5EF4-FFF2-40B4-BE49-F238E27FC236}">
-                <a16:creationId xmlns:a16="http://schemas.microsoft.com/office/drawing/2014/main" id="{E301AC99-3580-4BCE-BE5E-C56EF2EE05A4}"/>
-              </a:ext>
-            </a:extLst>
-          </p:cNvPr>
+            <a:endParaRPr lang="en-US" dirty="0"/>
+          </a:p>
+        </p:txBody>
+      </p:sp>
+      <p:sp>
+        <p:nvSpPr>
+          <p:cNvPr id="3" name="Content Placeholder 2"/>
           <p:cNvSpPr>
             <a:spLocks noGrp="1"/>
           </p:cNvSpPr>
@@ -1289,13 +1283,41 @@
         </p:nvSpPr>
         <p:spPr>
           <a:xfrm>
-            <a:off x="838200" y="1825625"/>
-            <a:ext cx="5181600" cy="4351338"/>
+            <a:off x="1143000" y="2057399"/>
+            <a:ext cx="4754880" cy="4023360"/>
           </a:xfrm>
         </p:spPr>
         <p:txBody>
           <a:bodyPr/>
-          <a:lstStyle/>
+          <a:lstStyle>
+            <a:lvl1pPr>
+              <a:defRPr sz="2200"/>
+            </a:lvl1pPr>
+            <a:lvl2pPr>
+              <a:defRPr sz="2000"/>
+            </a:lvl2pPr>
+            <a:lvl3pPr>
+              <a:defRPr sz="1800"/>
+            </a:lvl3pPr>
+            <a:lvl4pPr>
+              <a:defRPr sz="1600"/>
+            </a:lvl4pPr>
+            <a:lvl5pPr>
+              <a:defRPr sz="1600"/>
+            </a:lvl5pPr>
+            <a:lvl6pPr>
+              <a:defRPr sz="1600"/>
+            </a:lvl6pPr>
+            <a:lvl7pPr>
+              <a:defRPr sz="1600"/>
+            </a:lvl7pPr>
+            <a:lvl8pPr>
+              <a:defRPr sz="1600"/>
+            </a:lvl8pPr>
+            <a:lvl9pPr>
+              <a:defRPr sz="1600"/>
+            </a:lvl9pPr>
+          </a:lstStyle>
           <a:p>
             <a:pPr lvl="0"/>
             <a:r>
@@ -1330,19 +1352,13 @@
               <a:rPr lang="en-US"/>
               <a:t>Fifth level</a:t>
             </a:r>
-            <a:endParaRPr lang="ru-RU"/>
-          </a:p>
-        </p:txBody>
-      </p:sp>
-      <p:sp>
-        <p:nvSpPr>
-          <p:cNvPr id="4" name="Content Placeholder 3">
-            <a:extLst>
-              <a:ext uri="{FF2B5EF4-FFF2-40B4-BE49-F238E27FC236}">
-                <a16:creationId xmlns:a16="http://schemas.microsoft.com/office/drawing/2014/main" id="{5E679D4C-5250-4549-B532-DBB09025312A}"/>
-              </a:ext>
-            </a:extLst>
-          </p:cNvPr>
+            <a:endParaRPr lang="en-US" dirty="0"/>
+          </a:p>
+        </p:txBody>
+      </p:sp>
+      <p:sp>
+        <p:nvSpPr>
+          <p:cNvPr id="4" name="Content Placeholder 3"/>
           <p:cNvSpPr>
             <a:spLocks noGrp="1"/>
           </p:cNvSpPr>
@@ -1352,13 +1368,41 @@
         </p:nvSpPr>
         <p:spPr>
           <a:xfrm>
-            <a:off x="6172200" y="1825625"/>
-            <a:ext cx="5181600" cy="4351338"/>
+            <a:off x="6267612" y="2057400"/>
+            <a:ext cx="4754880" cy="4023360"/>
           </a:xfrm>
         </p:spPr>
         <p:txBody>
           <a:bodyPr/>
-          <a:lstStyle/>
+          <a:lstStyle>
+            <a:lvl1pPr>
+              <a:defRPr sz="2200"/>
+            </a:lvl1pPr>
+            <a:lvl2pPr>
+              <a:defRPr sz="2000"/>
+            </a:lvl2pPr>
+            <a:lvl3pPr>
+              <a:defRPr sz="1800"/>
+            </a:lvl3pPr>
+            <a:lvl4pPr>
+              <a:defRPr sz="1600"/>
+            </a:lvl4pPr>
+            <a:lvl5pPr>
+              <a:defRPr sz="1600"/>
+            </a:lvl5pPr>
+            <a:lvl6pPr>
+              <a:defRPr sz="1600"/>
+            </a:lvl6pPr>
+            <a:lvl7pPr>
+              <a:defRPr sz="1600"/>
+            </a:lvl7pPr>
+            <a:lvl8pPr>
+              <a:defRPr sz="1600"/>
+            </a:lvl8pPr>
+            <a:lvl9pPr>
+              <a:defRPr sz="1600"/>
+            </a:lvl9pPr>
+          </a:lstStyle>
           <a:p>
             <a:pPr lvl="0"/>
             <a:r>
@@ -1393,19 +1437,13 @@
               <a:rPr lang="en-US"/>
               <a:t>Fifth level</a:t>
             </a:r>
-            <a:endParaRPr lang="ru-RU"/>
-          </a:p>
-        </p:txBody>
-      </p:sp>
-      <p:sp>
-        <p:nvSpPr>
-          <p:cNvPr id="5" name="Date Placeholder 4">
-            <a:extLst>
-              <a:ext uri="{FF2B5EF4-FFF2-40B4-BE49-F238E27FC236}">
-                <a16:creationId xmlns:a16="http://schemas.microsoft.com/office/drawing/2014/main" id="{AEAB0877-1F2E-4CE5-9632-C89F6612202D}"/>
-              </a:ext>
-            </a:extLst>
-          </p:cNvPr>
+            <a:endParaRPr lang="en-US" dirty="0"/>
+          </a:p>
+        </p:txBody>
+      </p:sp>
+      <p:sp>
+        <p:nvSpPr>
+          <p:cNvPr id="5" name="Date Placeholder 4"/>
           <p:cNvSpPr>
             <a:spLocks noGrp="1"/>
           </p:cNvSpPr>
@@ -1420,7 +1458,7 @@
           <a:p>
             <a:fld id="{1A670E6B-6FFF-4C4E-911D-FC811DD883A8}" type="datetimeFigureOut">
               <a:rPr lang="ru-RU" smtClean="0"/>
-              <a:t>16.06.2023</a:t>
+              <a:t>21.06.2023</a:t>
             </a:fld>
             <a:endParaRPr lang="ru-RU"/>
           </a:p>
@@ -1428,13 +1466,7 @@
       </p:sp>
       <p:sp>
         <p:nvSpPr>
-          <p:cNvPr id="6" name="Footer Placeholder 5">
-            <a:extLst>
-              <a:ext uri="{FF2B5EF4-FFF2-40B4-BE49-F238E27FC236}">
-                <a16:creationId xmlns:a16="http://schemas.microsoft.com/office/drawing/2014/main" id="{ABB57352-4C05-4E26-BF46-33D6E758EEB7}"/>
-              </a:ext>
-            </a:extLst>
-          </p:cNvPr>
+          <p:cNvPr id="6" name="Footer Placeholder 5"/>
           <p:cNvSpPr>
             <a:spLocks noGrp="1"/>
           </p:cNvSpPr>
@@ -1453,13 +1485,7 @@
       </p:sp>
       <p:sp>
         <p:nvSpPr>
-          <p:cNvPr id="7" name="Slide Number Placeholder 6">
-            <a:extLst>
-              <a:ext uri="{FF2B5EF4-FFF2-40B4-BE49-F238E27FC236}">
-                <a16:creationId xmlns:a16="http://schemas.microsoft.com/office/drawing/2014/main" id="{403DDB50-BE34-4546-B5EB-B86963FC654E}"/>
-              </a:ext>
-            </a:extLst>
-          </p:cNvPr>
+          <p:cNvPr id="7" name="Slide Number Placeholder 6"/>
           <p:cNvSpPr>
             <a:spLocks noGrp="1"/>
           </p:cNvSpPr>
@@ -1483,7 +1509,7 @@
     </p:spTree>
     <p:extLst>
       <p:ext uri="{BB962C8B-B14F-4D97-AF65-F5344CB8AC3E}">
-        <p14:creationId xmlns:p14="http://schemas.microsoft.com/office/powerpoint/2010/main" val="2305412149"/>
+        <p14:creationId xmlns:p14="http://schemas.microsoft.com/office/powerpoint/2010/main" val="2718763901"/>
       </p:ext>
     </p:extLst>
   </p:cSld>
@@ -1512,64 +1538,50 @@
       </p:grpSpPr>
       <p:sp>
         <p:nvSpPr>
-          <p:cNvPr id="2" name="Title 1">
-            <a:extLst>
-              <a:ext uri="{FF2B5EF4-FFF2-40B4-BE49-F238E27FC236}">
-                <a16:creationId xmlns:a16="http://schemas.microsoft.com/office/drawing/2014/main" id="{E147465C-3316-47A1-9DD4-560D1D277BC0}"/>
-              </a:ext>
-            </a:extLst>
-          </p:cNvPr>
+          <p:cNvPr id="10" name="Title 9"/>
           <p:cNvSpPr>
             <a:spLocks noGrp="1"/>
           </p:cNvSpPr>
           <p:nvPr>
             <p:ph type="title"/>
+          </p:nvPr>
+        </p:nvSpPr>
+        <p:spPr/>
+        <p:txBody>
+          <a:bodyPr/>
+          <a:lstStyle/>
+          <a:p>
+            <a:r>
+              <a:rPr lang="en-US"/>
+              <a:t>Click to edit Master title style</a:t>
+            </a:r>
+            <a:endParaRPr lang="en-US" dirty="0"/>
+          </a:p>
+        </p:txBody>
+      </p:sp>
+      <p:sp>
+        <p:nvSpPr>
+          <p:cNvPr id="3" name="Text Placeholder 2"/>
+          <p:cNvSpPr>
+            <a:spLocks noGrp="1"/>
+          </p:cNvSpPr>
+          <p:nvPr>
+            <p:ph type="body" idx="1"/>
           </p:nvPr>
         </p:nvSpPr>
         <p:spPr>
           <a:xfrm>
-            <a:off x="839788" y="365125"/>
-            <a:ext cx="10515600" cy="1325563"/>
+            <a:off x="1143000" y="2001511"/>
+            <a:ext cx="4754880" cy="777240"/>
           </a:xfrm>
         </p:spPr>
         <p:txBody>
-          <a:bodyPr/>
-          <a:lstStyle/>
-          <a:p>
-            <a:r>
-              <a:rPr lang="en-US"/>
-              <a:t>Click to edit Master title style</a:t>
-            </a:r>
-            <a:endParaRPr lang="ru-RU"/>
-          </a:p>
-        </p:txBody>
-      </p:sp>
-      <p:sp>
-        <p:nvSpPr>
-          <p:cNvPr id="3" name="Text Placeholder 2">
-            <a:extLst>
-              <a:ext uri="{FF2B5EF4-FFF2-40B4-BE49-F238E27FC236}">
-                <a16:creationId xmlns:a16="http://schemas.microsoft.com/office/drawing/2014/main" id="{97A72214-0E81-4EE0-9519-F57F3A9C4047}"/>
-              </a:ext>
-            </a:extLst>
-          </p:cNvPr>
-          <p:cNvSpPr>
-            <a:spLocks noGrp="1"/>
-          </p:cNvSpPr>
-          <p:nvPr>
-            <p:ph type="body" idx="1"/>
-          </p:nvPr>
-        </p:nvSpPr>
-        <p:spPr>
-          <a:xfrm>
-            <a:off x="839788" y="1681163"/>
-            <a:ext cx="5157787" cy="823912"/>
-          </a:xfrm>
-        </p:spPr>
-        <p:txBody>
-          <a:bodyPr anchor="b"/>
+          <a:bodyPr anchor="ctr"/>
           <a:lstStyle>
             <a:lvl1pPr marL="0" indent="0">
+              <a:spcBef>
+                <a:spcPts val="0"/>
+              </a:spcBef>
               <a:buNone/>
               <a:defRPr sz="2400" b="1"/>
             </a:lvl1pPr>
@@ -1617,13 +1629,7 @@
       </p:sp>
       <p:sp>
         <p:nvSpPr>
-          <p:cNvPr id="4" name="Content Placeholder 3">
-            <a:extLst>
-              <a:ext uri="{FF2B5EF4-FFF2-40B4-BE49-F238E27FC236}">
-                <a16:creationId xmlns:a16="http://schemas.microsoft.com/office/drawing/2014/main" id="{4883779C-F593-471B-9816-CFBC9CB45D77}"/>
-              </a:ext>
-            </a:extLst>
-          </p:cNvPr>
+          <p:cNvPr id="4" name="Content Placeholder 3"/>
           <p:cNvSpPr>
             <a:spLocks noGrp="1"/>
           </p:cNvSpPr>
@@ -1633,13 +1639,41 @@
         </p:nvSpPr>
         <p:spPr>
           <a:xfrm>
-            <a:off x="839788" y="2505075"/>
-            <a:ext cx="5157787" cy="3684588"/>
+            <a:off x="1143000" y="2721483"/>
+            <a:ext cx="4754880" cy="3383280"/>
           </a:xfrm>
         </p:spPr>
         <p:txBody>
           <a:bodyPr/>
-          <a:lstStyle/>
+          <a:lstStyle>
+            <a:lvl1pPr>
+              <a:defRPr sz="2200"/>
+            </a:lvl1pPr>
+            <a:lvl2pPr>
+              <a:defRPr sz="2000"/>
+            </a:lvl2pPr>
+            <a:lvl3pPr>
+              <a:defRPr sz="1800"/>
+            </a:lvl3pPr>
+            <a:lvl4pPr>
+              <a:defRPr sz="1600"/>
+            </a:lvl4pPr>
+            <a:lvl5pPr>
+              <a:defRPr sz="1600"/>
+            </a:lvl5pPr>
+            <a:lvl6pPr>
+              <a:defRPr sz="1600"/>
+            </a:lvl6pPr>
+            <a:lvl7pPr>
+              <a:defRPr sz="1600"/>
+            </a:lvl7pPr>
+            <a:lvl8pPr>
+              <a:defRPr sz="1600"/>
+            </a:lvl8pPr>
+            <a:lvl9pPr>
+              <a:defRPr sz="1600"/>
+            </a:lvl9pPr>
+          </a:lstStyle>
           <a:p>
             <a:pPr lvl="0"/>
             <a:r>
@@ -1674,19 +1708,13 @@
               <a:rPr lang="en-US"/>
               <a:t>Fifth level</a:t>
             </a:r>
-            <a:endParaRPr lang="ru-RU"/>
-          </a:p>
-        </p:txBody>
-      </p:sp>
-      <p:sp>
-        <p:nvSpPr>
-          <p:cNvPr id="5" name="Text Placeholder 4">
-            <a:extLst>
-              <a:ext uri="{FF2B5EF4-FFF2-40B4-BE49-F238E27FC236}">
-                <a16:creationId xmlns:a16="http://schemas.microsoft.com/office/drawing/2014/main" id="{A5552F1F-9142-4DFD-AB8F-FD4564744D3E}"/>
-              </a:ext>
-            </a:extLst>
-          </p:cNvPr>
+            <a:endParaRPr lang="en-US" dirty="0"/>
+          </a:p>
+        </p:txBody>
+      </p:sp>
+      <p:sp>
+        <p:nvSpPr>
+          <p:cNvPr id="5" name="Text Placeholder 4"/>
           <p:cNvSpPr>
             <a:spLocks noGrp="1"/>
           </p:cNvSpPr>
@@ -1696,14 +1724,17 @@
         </p:nvSpPr>
         <p:spPr>
           <a:xfrm>
-            <a:off x="6172200" y="1681163"/>
-            <a:ext cx="5183188" cy="823912"/>
+            <a:off x="6269173" y="1999032"/>
+            <a:ext cx="4754880" cy="777240"/>
           </a:xfrm>
         </p:spPr>
         <p:txBody>
-          <a:bodyPr anchor="b"/>
+          <a:bodyPr anchor="ctr"/>
           <a:lstStyle>
             <a:lvl1pPr marL="0" indent="0">
+              <a:spcBef>
+                <a:spcPts val="0"/>
+              </a:spcBef>
               <a:buNone/>
               <a:defRPr sz="2400" b="1"/>
             </a:lvl1pPr>
@@ -1751,13 +1782,7 @@
       </p:sp>
       <p:sp>
         <p:nvSpPr>
-          <p:cNvPr id="6" name="Content Placeholder 5">
-            <a:extLst>
-              <a:ext uri="{FF2B5EF4-FFF2-40B4-BE49-F238E27FC236}">
-                <a16:creationId xmlns:a16="http://schemas.microsoft.com/office/drawing/2014/main" id="{58F912C0-68CD-414B-A8D4-BCBFAEC42687}"/>
-              </a:ext>
-            </a:extLst>
-          </p:cNvPr>
+          <p:cNvPr id="6" name="Content Placeholder 5"/>
           <p:cNvSpPr>
             <a:spLocks noGrp="1"/>
           </p:cNvSpPr>
@@ -1767,13 +1792,41 @@
         </p:nvSpPr>
         <p:spPr>
           <a:xfrm>
-            <a:off x="6172200" y="2505075"/>
-            <a:ext cx="5183188" cy="3684588"/>
+            <a:off x="6269173" y="2719322"/>
+            <a:ext cx="4754880" cy="3383280"/>
           </a:xfrm>
         </p:spPr>
         <p:txBody>
           <a:bodyPr/>
-          <a:lstStyle/>
+          <a:lstStyle>
+            <a:lvl1pPr>
+              <a:defRPr sz="2200"/>
+            </a:lvl1pPr>
+            <a:lvl2pPr>
+              <a:defRPr sz="2000"/>
+            </a:lvl2pPr>
+            <a:lvl3pPr>
+              <a:defRPr sz="1800"/>
+            </a:lvl3pPr>
+            <a:lvl4pPr>
+              <a:defRPr sz="1600"/>
+            </a:lvl4pPr>
+            <a:lvl5pPr>
+              <a:defRPr sz="1600"/>
+            </a:lvl5pPr>
+            <a:lvl6pPr>
+              <a:defRPr sz="1600"/>
+            </a:lvl6pPr>
+            <a:lvl7pPr>
+              <a:defRPr sz="1600"/>
+            </a:lvl7pPr>
+            <a:lvl8pPr>
+              <a:defRPr sz="1600"/>
+            </a:lvl8pPr>
+            <a:lvl9pPr>
+              <a:defRPr sz="1600"/>
+            </a:lvl9pPr>
+          </a:lstStyle>
           <a:p>
             <a:pPr lvl="0"/>
             <a:r>
@@ -1808,19 +1861,13 @@
               <a:rPr lang="en-US"/>
               <a:t>Fifth level</a:t>
             </a:r>
-            <a:endParaRPr lang="ru-RU"/>
-          </a:p>
-        </p:txBody>
-      </p:sp>
-      <p:sp>
-        <p:nvSpPr>
-          <p:cNvPr id="7" name="Date Placeholder 6">
-            <a:extLst>
-              <a:ext uri="{FF2B5EF4-FFF2-40B4-BE49-F238E27FC236}">
-                <a16:creationId xmlns:a16="http://schemas.microsoft.com/office/drawing/2014/main" id="{214FF35F-ED89-4CEA-ABC2-EFE32DAE40E6}"/>
-              </a:ext>
-            </a:extLst>
-          </p:cNvPr>
+            <a:endParaRPr lang="en-US" dirty="0"/>
+          </a:p>
+        </p:txBody>
+      </p:sp>
+      <p:sp>
+        <p:nvSpPr>
+          <p:cNvPr id="7" name="Date Placeholder 6"/>
           <p:cNvSpPr>
             <a:spLocks noGrp="1"/>
           </p:cNvSpPr>
@@ -1835,7 +1882,7 @@
           <a:p>
             <a:fld id="{1A670E6B-6FFF-4C4E-911D-FC811DD883A8}" type="datetimeFigureOut">
               <a:rPr lang="ru-RU" smtClean="0"/>
-              <a:t>16.06.2023</a:t>
+              <a:t>21.06.2023</a:t>
             </a:fld>
             <a:endParaRPr lang="ru-RU"/>
           </a:p>
@@ -1843,13 +1890,7 @@
       </p:sp>
       <p:sp>
         <p:nvSpPr>
-          <p:cNvPr id="8" name="Footer Placeholder 7">
-            <a:extLst>
-              <a:ext uri="{FF2B5EF4-FFF2-40B4-BE49-F238E27FC236}">
-                <a16:creationId xmlns:a16="http://schemas.microsoft.com/office/drawing/2014/main" id="{E671D80B-C8F1-405D-B938-D04AAF414619}"/>
-              </a:ext>
-            </a:extLst>
-          </p:cNvPr>
+          <p:cNvPr id="8" name="Footer Placeholder 7"/>
           <p:cNvSpPr>
             <a:spLocks noGrp="1"/>
           </p:cNvSpPr>
@@ -1868,13 +1909,7 @@
       </p:sp>
       <p:sp>
         <p:nvSpPr>
-          <p:cNvPr id="9" name="Slide Number Placeholder 8">
-            <a:extLst>
-              <a:ext uri="{FF2B5EF4-FFF2-40B4-BE49-F238E27FC236}">
-                <a16:creationId xmlns:a16="http://schemas.microsoft.com/office/drawing/2014/main" id="{FE588BA1-E249-4876-8DA1-5D402DDF9668}"/>
-              </a:ext>
-            </a:extLst>
-          </p:cNvPr>
+          <p:cNvPr id="9" name="Slide Number Placeholder 8"/>
           <p:cNvSpPr>
             <a:spLocks noGrp="1"/>
           </p:cNvSpPr>
@@ -1898,7 +1933,7 @@
     </p:spTree>
     <p:extLst>
       <p:ext uri="{BB962C8B-B14F-4D97-AF65-F5344CB8AC3E}">
-        <p14:creationId xmlns:p14="http://schemas.microsoft.com/office/powerpoint/2010/main" val="2752003577"/>
+        <p14:creationId xmlns:p14="http://schemas.microsoft.com/office/powerpoint/2010/main" val="1066934738"/>
       </p:ext>
     </p:extLst>
   </p:cSld>
@@ -1927,13 +1962,7 @@
       </p:grpSpPr>
       <p:sp>
         <p:nvSpPr>
-          <p:cNvPr id="2" name="Title 1">
-            <a:extLst>
-              <a:ext uri="{FF2B5EF4-FFF2-40B4-BE49-F238E27FC236}">
-                <a16:creationId xmlns:a16="http://schemas.microsoft.com/office/drawing/2014/main" id="{286627F0-4C92-47EC-A563-2945A33A4D96}"/>
-              </a:ext>
-            </a:extLst>
-          </p:cNvPr>
+          <p:cNvPr id="2" name="Title 1"/>
           <p:cNvSpPr>
             <a:spLocks noGrp="1"/>
           </p:cNvSpPr>
@@ -1950,19 +1979,13 @@
               <a:rPr lang="en-US"/>
               <a:t>Click to edit Master title style</a:t>
             </a:r>
-            <a:endParaRPr lang="ru-RU"/>
-          </a:p>
-        </p:txBody>
-      </p:sp>
-      <p:sp>
-        <p:nvSpPr>
-          <p:cNvPr id="3" name="Date Placeholder 2">
-            <a:extLst>
-              <a:ext uri="{FF2B5EF4-FFF2-40B4-BE49-F238E27FC236}">
-                <a16:creationId xmlns:a16="http://schemas.microsoft.com/office/drawing/2014/main" id="{B96A72DB-78CB-4BAB-9E6F-D83A27F89836}"/>
-              </a:ext>
-            </a:extLst>
-          </p:cNvPr>
+            <a:endParaRPr lang="en-US" dirty="0"/>
+          </a:p>
+        </p:txBody>
+      </p:sp>
+      <p:sp>
+        <p:nvSpPr>
+          <p:cNvPr id="3" name="Date Placeholder 2"/>
           <p:cNvSpPr>
             <a:spLocks noGrp="1"/>
           </p:cNvSpPr>
@@ -1977,7 +2000,7 @@
           <a:p>
             <a:fld id="{1A670E6B-6FFF-4C4E-911D-FC811DD883A8}" type="datetimeFigureOut">
               <a:rPr lang="ru-RU" smtClean="0"/>
-              <a:t>16.06.2023</a:t>
+              <a:t>21.06.2023</a:t>
             </a:fld>
             <a:endParaRPr lang="ru-RU"/>
           </a:p>
@@ -1985,13 +2008,7 @@
       </p:sp>
       <p:sp>
         <p:nvSpPr>
-          <p:cNvPr id="4" name="Footer Placeholder 3">
-            <a:extLst>
-              <a:ext uri="{FF2B5EF4-FFF2-40B4-BE49-F238E27FC236}">
-                <a16:creationId xmlns:a16="http://schemas.microsoft.com/office/drawing/2014/main" id="{C1A360D1-DBDE-4717-A3F0-35479EA62825}"/>
-              </a:ext>
-            </a:extLst>
-          </p:cNvPr>
+          <p:cNvPr id="4" name="Footer Placeholder 3"/>
           <p:cNvSpPr>
             <a:spLocks noGrp="1"/>
           </p:cNvSpPr>
@@ -2010,13 +2027,7 @@
       </p:sp>
       <p:sp>
         <p:nvSpPr>
-          <p:cNvPr id="5" name="Slide Number Placeholder 4">
-            <a:extLst>
-              <a:ext uri="{FF2B5EF4-FFF2-40B4-BE49-F238E27FC236}">
-                <a16:creationId xmlns:a16="http://schemas.microsoft.com/office/drawing/2014/main" id="{45CEE1DF-C4D0-47FD-8A30-DFB530AAE887}"/>
-              </a:ext>
-            </a:extLst>
-          </p:cNvPr>
+          <p:cNvPr id="5" name="Slide Number Placeholder 4"/>
           <p:cNvSpPr>
             <a:spLocks noGrp="1"/>
           </p:cNvSpPr>
@@ -2040,7 +2051,7 @@
     </p:spTree>
     <p:extLst>
       <p:ext uri="{BB962C8B-B14F-4D97-AF65-F5344CB8AC3E}">
-        <p14:creationId xmlns:p14="http://schemas.microsoft.com/office/powerpoint/2010/main" val="634943481"/>
+        <p14:creationId xmlns:p14="http://schemas.microsoft.com/office/powerpoint/2010/main" val="1234226864"/>
       </p:ext>
     </p:extLst>
   </p:cSld>
@@ -2069,13 +2080,7 @@
       </p:grpSpPr>
       <p:sp>
         <p:nvSpPr>
-          <p:cNvPr id="2" name="Date Placeholder 1">
-            <a:extLst>
-              <a:ext uri="{FF2B5EF4-FFF2-40B4-BE49-F238E27FC236}">
-                <a16:creationId xmlns:a16="http://schemas.microsoft.com/office/drawing/2014/main" id="{73506EBF-0C12-469E-A813-9BEB9D553BC6}"/>
-              </a:ext>
-            </a:extLst>
-          </p:cNvPr>
+          <p:cNvPr id="2" name="Date Placeholder 1"/>
           <p:cNvSpPr>
             <a:spLocks noGrp="1"/>
           </p:cNvSpPr>
@@ -2090,7 +2095,7 @@
           <a:p>
             <a:fld id="{1A670E6B-6FFF-4C4E-911D-FC811DD883A8}" type="datetimeFigureOut">
               <a:rPr lang="ru-RU" smtClean="0"/>
-              <a:t>16.06.2023</a:t>
+              <a:t>21.06.2023</a:t>
             </a:fld>
             <a:endParaRPr lang="ru-RU"/>
           </a:p>
@@ -2098,13 +2103,7 @@
       </p:sp>
       <p:sp>
         <p:nvSpPr>
-          <p:cNvPr id="3" name="Footer Placeholder 2">
-            <a:extLst>
-              <a:ext uri="{FF2B5EF4-FFF2-40B4-BE49-F238E27FC236}">
-                <a16:creationId xmlns:a16="http://schemas.microsoft.com/office/drawing/2014/main" id="{89FE5FBE-7460-4101-947E-E75FA19B6ED5}"/>
-              </a:ext>
-            </a:extLst>
-          </p:cNvPr>
+          <p:cNvPr id="3" name="Footer Placeholder 2"/>
           <p:cNvSpPr>
             <a:spLocks noGrp="1"/>
           </p:cNvSpPr>
@@ -2123,13 +2122,7 @@
       </p:sp>
       <p:sp>
         <p:nvSpPr>
-          <p:cNvPr id="4" name="Slide Number Placeholder 3">
-            <a:extLst>
-              <a:ext uri="{FF2B5EF4-FFF2-40B4-BE49-F238E27FC236}">
-                <a16:creationId xmlns:a16="http://schemas.microsoft.com/office/drawing/2014/main" id="{30D0959D-6550-4F58-809E-33B9CFC54471}"/>
-              </a:ext>
-            </a:extLst>
-          </p:cNvPr>
+          <p:cNvPr id="4" name="Slide Number Placeholder 3"/>
           <p:cNvSpPr>
             <a:spLocks noGrp="1"/>
           </p:cNvSpPr>
@@ -2153,7 +2146,7 @@
     </p:spTree>
     <p:extLst>
       <p:ext uri="{BB962C8B-B14F-4D97-AF65-F5344CB8AC3E}">
-        <p14:creationId xmlns:p14="http://schemas.microsoft.com/office/powerpoint/2010/main" val="1113706709"/>
+        <p14:creationId xmlns:p14="http://schemas.microsoft.com/office/powerpoint/2010/main" val="653825520"/>
       </p:ext>
     </p:extLst>
   </p:cSld>
@@ -2182,13 +2175,7 @@
       </p:grpSpPr>
       <p:sp>
         <p:nvSpPr>
-          <p:cNvPr id="2" name="Title 1">
-            <a:extLst>
-              <a:ext uri="{FF2B5EF4-FFF2-40B4-BE49-F238E27FC236}">
-                <a16:creationId xmlns:a16="http://schemas.microsoft.com/office/drawing/2014/main" id="{CD680B22-A832-46AB-BD88-A8DAA7F50AC7}"/>
-              </a:ext>
-            </a:extLst>
-          </p:cNvPr>
+          <p:cNvPr id="2" name="Title 1"/>
           <p:cNvSpPr>
             <a:spLocks noGrp="1"/>
           </p:cNvSpPr>
@@ -2198,15 +2185,20 @@
         </p:nvSpPr>
         <p:spPr>
           <a:xfrm>
-            <a:off x="839788" y="457200"/>
-            <a:ext cx="3932237" cy="1600200"/>
+            <a:off x="1143000" y="1097280"/>
+            <a:ext cx="3931920" cy="1737360"/>
           </a:xfrm>
         </p:spPr>
         <p:txBody>
-          <a:bodyPr anchor="b"/>
+          <a:bodyPr anchor="b">
+            <a:noAutofit/>
+          </a:bodyPr>
           <a:lstStyle>
             <a:lvl1pPr>
-              <a:defRPr sz="3200"/>
+              <a:lnSpc>
+                <a:spcPct val="90000"/>
+              </a:lnSpc>
+              <a:defRPr sz="4000" b="0"/>
             </a:lvl1pPr>
           </a:lstStyle>
           <a:p>
@@ -2214,19 +2206,13 @@
               <a:rPr lang="en-US"/>
               <a:t>Click to edit Master title style</a:t>
             </a:r>
-            <a:endParaRPr lang="ru-RU"/>
-          </a:p>
-        </p:txBody>
-      </p:sp>
-      <p:sp>
-        <p:nvSpPr>
-          <p:cNvPr id="3" name="Content Placeholder 2">
-            <a:extLst>
-              <a:ext uri="{FF2B5EF4-FFF2-40B4-BE49-F238E27FC236}">
-                <a16:creationId xmlns:a16="http://schemas.microsoft.com/office/drawing/2014/main" id="{B5A665FB-17B4-4B64-826E-6483FE75EBFB}"/>
-              </a:ext>
-            </a:extLst>
-          </p:cNvPr>
+            <a:endParaRPr lang="en-US" dirty="0"/>
+          </a:p>
+        </p:txBody>
+      </p:sp>
+      <p:sp>
+        <p:nvSpPr>
+          <p:cNvPr id="3" name="Content Placeholder 2"/>
           <p:cNvSpPr>
             <a:spLocks noGrp="1"/>
           </p:cNvSpPr>
@@ -2236,8 +2222,8 @@
         </p:nvSpPr>
         <p:spPr>
           <a:xfrm>
-            <a:off x="5183188" y="987425"/>
-            <a:ext cx="6172200" cy="4873625"/>
+            <a:off x="5852159" y="1097280"/>
+            <a:ext cx="5212080" cy="4663440"/>
           </a:xfrm>
         </p:spPr>
         <p:txBody>
@@ -2305,19 +2291,13 @@
               <a:rPr lang="en-US"/>
               <a:t>Fifth level</a:t>
             </a:r>
-            <a:endParaRPr lang="ru-RU"/>
-          </a:p>
-        </p:txBody>
-      </p:sp>
-      <p:sp>
-        <p:nvSpPr>
-          <p:cNvPr id="4" name="Text Placeholder 3">
-            <a:extLst>
-              <a:ext uri="{FF2B5EF4-FFF2-40B4-BE49-F238E27FC236}">
-                <a16:creationId xmlns:a16="http://schemas.microsoft.com/office/drawing/2014/main" id="{106C7E09-94B3-4CA1-B61F-A3DF2DDB3ED1}"/>
-              </a:ext>
-            </a:extLst>
-          </p:cNvPr>
+            <a:endParaRPr lang="en-US" dirty="0"/>
+          </a:p>
+        </p:txBody>
+      </p:sp>
+      <p:sp>
+        <p:nvSpPr>
+          <p:cNvPr id="4" name="Text Placeholder 3"/>
           <p:cNvSpPr>
             <a:spLocks noGrp="1"/>
           </p:cNvSpPr>
@@ -2327,48 +2307,56 @@
         </p:nvSpPr>
         <p:spPr>
           <a:xfrm>
-            <a:off x="839788" y="2057400"/>
-            <a:ext cx="3932237" cy="3811588"/>
+            <a:off x="1143000" y="2834640"/>
+            <a:ext cx="3931920" cy="3017520"/>
           </a:xfrm>
         </p:spPr>
         <p:txBody>
-          <a:bodyPr/>
+          <a:bodyPr>
+            <a:normAutofit/>
+          </a:bodyPr>
           <a:lstStyle>
             <a:lvl1pPr marL="0" indent="0">
-              <a:buNone/>
-              <a:defRPr sz="1600"/>
+              <a:lnSpc>
+                <a:spcPct val="100000"/>
+              </a:lnSpc>
+              <a:spcBef>
+                <a:spcPts val="1000"/>
+              </a:spcBef>
+              <a:buNone/>
+              <a:defRPr sz="1700"/>
             </a:lvl1pPr>
             <a:lvl2pPr marL="457200" indent="0">
               <a:buNone/>
-              <a:defRPr sz="1400"/>
+              <a:defRPr sz="1200"/>
             </a:lvl2pPr>
             <a:lvl3pPr marL="914400" indent="0">
               <a:buNone/>
-              <a:defRPr sz="1200"/>
+              <a:defRPr sz="1000"/>
             </a:lvl3pPr>
             <a:lvl4pPr marL="1371600" indent="0">
               <a:buNone/>
-              <a:defRPr sz="1000"/>
+              <a:defRPr sz="900"/>
             </a:lvl4pPr>
             <a:lvl5pPr marL="1828800" indent="0">
               <a:buNone/>
-              <a:defRPr sz="1000"/>
+              <a:defRPr sz="900"/>
             </a:lvl5pPr>
             <a:lvl6pPr marL="2286000" indent="0">
               <a:buNone/>
-              <a:defRPr sz="1000"/>
+              <a:defRPr sz="900"/>
             </a:lvl6pPr>
             <a:lvl7pPr marL="2743200" indent="0">
               <a:buNone/>
-              <a:defRPr sz="1000"/>
+              <a:defRPr sz="900"/>
             </a:lvl7pPr>
             <a:lvl8pPr marL="3200400" indent="0">
               <a:buNone/>
-              <a:defRPr sz="1000"/>
+              <a:defRPr sz="900"/>
             </a:lvl8pPr>
             <a:lvl9pPr marL="3657600" indent="0">
               <a:buNone/>
-              <a:defRPr sz="1000"/>
+              <a:defRPr sz="900"/>
             </a:lvl9pPr>
           </a:lstStyle>
           <a:p>
@@ -2382,13 +2370,7 @@
       </p:sp>
       <p:sp>
         <p:nvSpPr>
-          <p:cNvPr id="5" name="Date Placeholder 4">
-            <a:extLst>
-              <a:ext uri="{FF2B5EF4-FFF2-40B4-BE49-F238E27FC236}">
-                <a16:creationId xmlns:a16="http://schemas.microsoft.com/office/drawing/2014/main" id="{E5297A30-02F2-4B53-9716-117203180453}"/>
-              </a:ext>
-            </a:extLst>
-          </p:cNvPr>
+          <p:cNvPr id="5" name="Date Placeholder 4"/>
           <p:cNvSpPr>
             <a:spLocks noGrp="1"/>
           </p:cNvSpPr>
@@ -2403,7 +2385,7 @@
           <a:p>
             <a:fld id="{1A670E6B-6FFF-4C4E-911D-FC811DD883A8}" type="datetimeFigureOut">
               <a:rPr lang="ru-RU" smtClean="0"/>
-              <a:t>16.06.2023</a:t>
+              <a:t>21.06.2023</a:t>
             </a:fld>
             <a:endParaRPr lang="ru-RU"/>
           </a:p>
@@ -2411,13 +2393,7 @@
       </p:sp>
       <p:sp>
         <p:nvSpPr>
-          <p:cNvPr id="6" name="Footer Placeholder 5">
-            <a:extLst>
-              <a:ext uri="{FF2B5EF4-FFF2-40B4-BE49-F238E27FC236}">
-                <a16:creationId xmlns:a16="http://schemas.microsoft.com/office/drawing/2014/main" id="{086142E2-66D3-40FA-B288-902A2C22AC5F}"/>
-              </a:ext>
-            </a:extLst>
-          </p:cNvPr>
+          <p:cNvPr id="6" name="Footer Placeholder 5"/>
           <p:cNvSpPr>
             <a:spLocks noGrp="1"/>
           </p:cNvSpPr>
@@ -2436,13 +2412,7 @@
       </p:sp>
       <p:sp>
         <p:nvSpPr>
-          <p:cNvPr id="7" name="Slide Number Placeholder 6">
-            <a:extLst>
-              <a:ext uri="{FF2B5EF4-FFF2-40B4-BE49-F238E27FC236}">
-                <a16:creationId xmlns:a16="http://schemas.microsoft.com/office/drawing/2014/main" id="{45B9385E-4468-412D-A64B-FE76C4BF19BD}"/>
-              </a:ext>
-            </a:extLst>
-          </p:cNvPr>
+          <p:cNvPr id="7" name="Slide Number Placeholder 6"/>
           <p:cNvSpPr>
             <a:spLocks noGrp="1"/>
           </p:cNvSpPr>
@@ -2466,7 +2436,7 @@
     </p:spTree>
     <p:extLst>
       <p:ext uri="{BB962C8B-B14F-4D97-AF65-F5344CB8AC3E}">
-        <p14:creationId xmlns:p14="http://schemas.microsoft.com/office/powerpoint/2010/main" val="1894998073"/>
+        <p14:creationId xmlns:p14="http://schemas.microsoft.com/office/powerpoint/2010/main" val="181989711"/>
       </p:ext>
     </p:extLst>
   </p:cSld>
@@ -2495,13 +2465,7 @@
       </p:grpSpPr>
       <p:sp>
         <p:nvSpPr>
-          <p:cNvPr id="2" name="Title 1">
-            <a:extLst>
-              <a:ext uri="{FF2B5EF4-FFF2-40B4-BE49-F238E27FC236}">
-                <a16:creationId xmlns:a16="http://schemas.microsoft.com/office/drawing/2014/main" id="{664B92E7-CF90-45EA-B9E6-A32CE40E63D2}"/>
-              </a:ext>
-            </a:extLst>
-          </p:cNvPr>
+          <p:cNvPr id="2" name="Title 1"/>
           <p:cNvSpPr>
             <a:spLocks noGrp="1"/>
           </p:cNvSpPr>
@@ -2511,15 +2475,20 @@
         </p:nvSpPr>
         <p:spPr>
           <a:xfrm>
-            <a:off x="839788" y="457200"/>
-            <a:ext cx="3932237" cy="1600200"/>
+            <a:off x="1143000" y="1097280"/>
+            <a:ext cx="3931920" cy="1737360"/>
           </a:xfrm>
         </p:spPr>
         <p:txBody>
-          <a:bodyPr anchor="b"/>
+          <a:bodyPr anchor="b">
+            <a:noAutofit/>
+          </a:bodyPr>
           <a:lstStyle>
             <a:lvl1pPr>
-              <a:defRPr sz="3200"/>
+              <a:lnSpc>
+                <a:spcPct val="90000"/>
+              </a:lnSpc>
+              <a:defRPr sz="4000" b="0"/>
             </a:lvl1pPr>
           </a:lstStyle>
           <a:p>
@@ -2527,21 +2496,15 @@
               <a:rPr lang="en-US"/>
               <a:t>Click to edit Master title style</a:t>
             </a:r>
-            <a:endParaRPr lang="ru-RU"/>
-          </a:p>
-        </p:txBody>
-      </p:sp>
-      <p:sp>
-        <p:nvSpPr>
-          <p:cNvPr id="3" name="Picture Placeholder 2">
-            <a:extLst>
-              <a:ext uri="{FF2B5EF4-FFF2-40B4-BE49-F238E27FC236}">
-                <a16:creationId xmlns:a16="http://schemas.microsoft.com/office/drawing/2014/main" id="{49BC0F93-7F83-4178-BB1B-BE8F14464F31}"/>
-              </a:ext>
-            </a:extLst>
-          </p:cNvPr>
-          <p:cNvSpPr>
-            <a:spLocks noGrp="1"/>
+            <a:endParaRPr lang="en-US" dirty="0"/>
+          </a:p>
+        </p:txBody>
+      </p:sp>
+      <p:sp>
+        <p:nvSpPr>
+          <p:cNvPr id="3" name="Picture Placeholder 2"/>
+          <p:cNvSpPr>
+            <a:spLocks noGrp="1" noChangeAspect="1"/>
           </p:cNvSpPr>
           <p:nvPr>
             <p:ph type="pic" idx="1"/>
@@ -2549,16 +2512,18 @@
         </p:nvSpPr>
         <p:spPr>
           <a:xfrm>
-            <a:off x="5183188" y="987425"/>
-            <a:ext cx="6172200" cy="4873625"/>
+            <a:off x="5413248" y="1069847"/>
+            <a:ext cx="6099048" cy="4800600"/>
           </a:xfrm>
         </p:spPr>
         <p:txBody>
-          <a:bodyPr/>
+          <a:bodyPr lIns="274320" tIns="182880" anchor="t">
+            <a:normAutofit/>
+          </a:bodyPr>
           <a:lstStyle>
             <a:lvl1pPr marL="0" indent="0">
               <a:buNone/>
-              <a:defRPr sz="3200"/>
+              <a:defRPr sz="2800"/>
             </a:lvl1pPr>
             <a:lvl2pPr marL="457200" indent="0">
               <a:buNone/>
@@ -2594,19 +2559,17 @@
             </a:lvl9pPr>
           </a:lstStyle>
           <a:p>
-            <a:endParaRPr lang="ru-RU"/>
-          </a:p>
-        </p:txBody>
-      </p:sp>
-      <p:sp>
-        <p:nvSpPr>
-          <p:cNvPr id="4" name="Text Placeholder 3">
-            <a:extLst>
-              <a:ext uri="{FF2B5EF4-FFF2-40B4-BE49-F238E27FC236}">
-                <a16:creationId xmlns:a16="http://schemas.microsoft.com/office/drawing/2014/main" id="{2BCCF7CD-1C91-4E5C-9432-6080635B6377}"/>
-              </a:ext>
-            </a:extLst>
-          </p:cNvPr>
+            <a:r>
+              <a:rPr lang="en-US"/>
+              <a:t>Click icon to add picture</a:t>
+            </a:r>
+            <a:endParaRPr lang="en-US" dirty="0"/>
+          </a:p>
+        </p:txBody>
+      </p:sp>
+      <p:sp>
+        <p:nvSpPr>
+          <p:cNvPr id="4" name="Text Placeholder 3"/>
           <p:cNvSpPr>
             <a:spLocks noGrp="1"/>
           </p:cNvSpPr>
@@ -2616,48 +2579,56 @@
         </p:nvSpPr>
         <p:spPr>
           <a:xfrm>
-            <a:off x="839788" y="2057400"/>
-            <a:ext cx="3932237" cy="3811588"/>
+            <a:off x="1143000" y="2834640"/>
+            <a:ext cx="3931920" cy="2880360"/>
           </a:xfrm>
         </p:spPr>
         <p:txBody>
-          <a:bodyPr/>
+          <a:bodyPr>
+            <a:normAutofit/>
+          </a:bodyPr>
           <a:lstStyle>
             <a:lvl1pPr marL="0" indent="0">
-              <a:buNone/>
-              <a:defRPr sz="1600"/>
+              <a:lnSpc>
+                <a:spcPct val="100000"/>
+              </a:lnSpc>
+              <a:spcBef>
+                <a:spcPts val="1000"/>
+              </a:spcBef>
+              <a:buNone/>
+              <a:defRPr sz="1700"/>
             </a:lvl1pPr>
             <a:lvl2pPr marL="457200" indent="0">
               <a:buNone/>
-              <a:defRPr sz="1400"/>
+              <a:defRPr sz="1200"/>
             </a:lvl2pPr>
             <a:lvl3pPr marL="914400" indent="0">
               <a:buNone/>
-              <a:defRPr sz="1200"/>
+              <a:defRPr sz="1000"/>
             </a:lvl3pPr>
             <a:lvl4pPr marL="1371600" indent="0">
               <a:buNone/>
-              <a:defRPr sz="1000"/>
+              <a:defRPr sz="900"/>
             </a:lvl4pPr>
             <a:lvl5pPr marL="1828800" indent="0">
               <a:buNone/>
-              <a:defRPr sz="1000"/>
+              <a:defRPr sz="900"/>
             </a:lvl5pPr>
             <a:lvl6pPr marL="2286000" indent="0">
               <a:buNone/>
-              <a:defRPr sz="1000"/>
+              <a:defRPr sz="900"/>
             </a:lvl6pPr>
             <a:lvl7pPr marL="2743200" indent="0">
               <a:buNone/>
-              <a:defRPr sz="1000"/>
+              <a:defRPr sz="900"/>
             </a:lvl7pPr>
             <a:lvl8pPr marL="3200400" indent="0">
               <a:buNone/>
-              <a:defRPr sz="1000"/>
+              <a:defRPr sz="900"/>
             </a:lvl8pPr>
             <a:lvl9pPr marL="3657600" indent="0">
               <a:buNone/>
-              <a:defRPr sz="1000"/>
+              <a:defRPr sz="900"/>
             </a:lvl9pPr>
           </a:lstStyle>
           <a:p>
@@ -2671,13 +2642,7 @@
       </p:sp>
       <p:sp>
         <p:nvSpPr>
-          <p:cNvPr id="5" name="Date Placeholder 4">
-            <a:extLst>
-              <a:ext uri="{FF2B5EF4-FFF2-40B4-BE49-F238E27FC236}">
-                <a16:creationId xmlns:a16="http://schemas.microsoft.com/office/drawing/2014/main" id="{C260C151-D621-425F-970D-E106C7FAC9C7}"/>
-              </a:ext>
-            </a:extLst>
-          </p:cNvPr>
+          <p:cNvPr id="5" name="Date Placeholder 4"/>
           <p:cNvSpPr>
             <a:spLocks noGrp="1"/>
           </p:cNvSpPr>
@@ -2692,7 +2657,7 @@
           <a:p>
             <a:fld id="{1A670E6B-6FFF-4C4E-911D-FC811DD883A8}" type="datetimeFigureOut">
               <a:rPr lang="ru-RU" smtClean="0"/>
-              <a:t>16.06.2023</a:t>
+              <a:t>21.06.2023</a:t>
             </a:fld>
             <a:endParaRPr lang="ru-RU"/>
           </a:p>
@@ -2700,13 +2665,7 @@
       </p:sp>
       <p:sp>
         <p:nvSpPr>
-          <p:cNvPr id="6" name="Footer Placeholder 5">
-            <a:extLst>
-              <a:ext uri="{FF2B5EF4-FFF2-40B4-BE49-F238E27FC236}">
-                <a16:creationId xmlns:a16="http://schemas.microsoft.com/office/drawing/2014/main" id="{F878B4FB-8C56-4070-BC2B-0E90DA6F6CAE}"/>
-              </a:ext>
-            </a:extLst>
-          </p:cNvPr>
+          <p:cNvPr id="6" name="Footer Placeholder 5"/>
           <p:cNvSpPr>
             <a:spLocks noGrp="1"/>
           </p:cNvSpPr>
@@ -2725,13 +2684,7 @@
       </p:sp>
       <p:sp>
         <p:nvSpPr>
-          <p:cNvPr id="7" name="Slide Number Placeholder 6">
-            <a:extLst>
-              <a:ext uri="{FF2B5EF4-FFF2-40B4-BE49-F238E27FC236}">
-                <a16:creationId xmlns:a16="http://schemas.microsoft.com/office/drawing/2014/main" id="{BA4A48AB-6EEF-4100-8DBB-2240129BE9ED}"/>
-              </a:ext>
-            </a:extLst>
-          </p:cNvPr>
+          <p:cNvPr id="7" name="Slide Number Placeholder 6"/>
           <p:cNvSpPr>
             <a:spLocks noGrp="1"/>
           </p:cNvSpPr>
@@ -2755,7 +2708,7 @@
     </p:spTree>
     <p:extLst>
       <p:ext uri="{BB962C8B-B14F-4D97-AF65-F5344CB8AC3E}">
-        <p14:creationId xmlns:p14="http://schemas.microsoft.com/office/powerpoint/2010/main" val="1874531789"/>
+        <p14:creationId xmlns:p14="http://schemas.microsoft.com/office/powerpoint/2010/main" val="3545962204"/>
       </p:ext>
     </p:extLst>
   </p:cSld>
@@ -2769,9 +2722,12 @@
 <p:sldMaster xmlns:a="http://schemas.openxmlformats.org/drawingml/2006/main" xmlns:r="http://schemas.openxmlformats.org/officeDocument/2006/relationships" xmlns:p="http://schemas.openxmlformats.org/presentationml/2006/main">
   <p:cSld>
     <p:bg>
-      <p:bgRef idx="1001">
-        <a:schemeClr val="bg1"/>
-      </p:bgRef>
+      <p:bgPr>
+        <a:solidFill>
+          <a:schemeClr val="accent1"/>
+        </a:solidFill>
+        <a:effectLst/>
+      </p:bgPr>
     </p:bg>
     <p:spTree>
       <p:nvGrpSpPr>
@@ -2789,24 +2745,58 @@
       </p:grpSpPr>
       <p:sp>
         <p:nvSpPr>
-          <p:cNvPr id="2" name="Title Placeholder 1">
-            <a:extLst>
-              <a:ext uri="{FF2B5EF4-FFF2-40B4-BE49-F238E27FC236}">
-                <a16:creationId xmlns:a16="http://schemas.microsoft.com/office/drawing/2014/main" id="{C3687D60-24EC-423C-A7B2-A934691B4F16}"/>
-              </a:ext>
-            </a:extLst>
-          </p:cNvPr>
-          <p:cNvSpPr>
-            <a:spLocks noGrp="1"/>
-          </p:cNvSpPr>
-          <p:nvPr>
-            <p:ph type="title"/>
-          </p:nvPr>
+          <p:cNvPr id="7" name="Rectangle 6"/>
+          <p:cNvSpPr>
+            <a:spLocks noChangeAspect="1"/>
+          </p:cNvSpPr>
+          <p:nvPr/>
         </p:nvSpPr>
         <p:spPr>
           <a:xfrm>
-            <a:off x="838200" y="365125"/>
-            <a:ext cx="10515600" cy="1325563"/>
+            <a:off x="231140" y="243840"/>
+            <a:ext cx="11724640" cy="6377939"/>
+          </a:xfrm>
+          <a:prstGeom prst="rect">
+            <a:avLst/>
+          </a:prstGeom>
+          <a:solidFill>
+            <a:schemeClr val="bg1"/>
+          </a:solidFill>
+          <a:ln w="12700">
+            <a:noFill/>
+          </a:ln>
+        </p:spPr>
+        <p:style>
+          <a:lnRef idx="2">
+            <a:schemeClr val="accent1">
+              <a:shade val="50000"/>
+            </a:schemeClr>
+          </a:lnRef>
+          <a:fillRef idx="1">
+            <a:schemeClr val="accent1"/>
+          </a:fillRef>
+          <a:effectRef idx="0">
+            <a:schemeClr val="accent1"/>
+          </a:effectRef>
+          <a:fontRef idx="minor">
+            <a:schemeClr val="lt1"/>
+          </a:fontRef>
+        </p:style>
+      </p:sp>
+      <p:sp>
+        <p:nvSpPr>
+          <p:cNvPr id="2" name="Title Placeholder 1"/>
+          <p:cNvSpPr>
+            <a:spLocks noGrp="1"/>
+          </p:cNvSpPr>
+          <p:nvPr>
+            <p:ph type="title"/>
+          </p:nvPr>
+        </p:nvSpPr>
+        <p:spPr>
+          <a:xfrm>
+            <a:off x="1143000" y="609600"/>
+            <a:ext cx="9875520" cy="1356360"/>
           </a:xfrm>
           <a:prstGeom prst="rect">
             <a:avLst/>
@@ -2822,19 +2812,13 @@
               <a:rPr lang="en-US"/>
               <a:t>Click to edit Master title style</a:t>
             </a:r>
-            <a:endParaRPr lang="ru-RU"/>
-          </a:p>
-        </p:txBody>
-      </p:sp>
-      <p:sp>
-        <p:nvSpPr>
-          <p:cNvPr id="3" name="Text Placeholder 2">
-            <a:extLst>
-              <a:ext uri="{FF2B5EF4-FFF2-40B4-BE49-F238E27FC236}">
-                <a16:creationId xmlns:a16="http://schemas.microsoft.com/office/drawing/2014/main" id="{E8CAE4B8-775F-491F-AA80-E70E6C9EC66A}"/>
-              </a:ext>
-            </a:extLst>
-          </p:cNvPr>
+            <a:endParaRPr lang="en-US" dirty="0"/>
+          </a:p>
+        </p:txBody>
+      </p:sp>
+      <p:sp>
+        <p:nvSpPr>
+          <p:cNvPr id="3" name="Text Placeholder 2"/>
           <p:cNvSpPr>
             <a:spLocks noGrp="1"/>
           </p:cNvSpPr>
@@ -2844,8 +2828,8 @@
         </p:nvSpPr>
         <p:spPr>
           <a:xfrm>
-            <a:off x="838200" y="1825625"/>
-            <a:ext cx="10515600" cy="4351338"/>
+            <a:off x="1143000" y="2057400"/>
+            <a:ext cx="9872871" cy="4038600"/>
           </a:xfrm>
           <a:prstGeom prst="rect">
             <a:avLst/>
@@ -2890,19 +2874,13 @@
               <a:rPr lang="en-US"/>
               <a:t>Fifth level</a:t>
             </a:r>
-            <a:endParaRPr lang="ru-RU"/>
-          </a:p>
-        </p:txBody>
-      </p:sp>
-      <p:sp>
-        <p:nvSpPr>
-          <p:cNvPr id="4" name="Date Placeholder 3">
-            <a:extLst>
-              <a:ext uri="{FF2B5EF4-FFF2-40B4-BE49-F238E27FC236}">
-                <a16:creationId xmlns:a16="http://schemas.microsoft.com/office/drawing/2014/main" id="{8E19A49F-7FB6-4124-BF32-492D5893005B}"/>
-              </a:ext>
-            </a:extLst>
-          </p:cNvPr>
+            <a:endParaRPr lang="en-US" dirty="0"/>
+          </a:p>
+        </p:txBody>
+      </p:sp>
+      <p:sp>
+        <p:nvSpPr>
+          <p:cNvPr id="4" name="Date Placeholder 3"/>
           <p:cNvSpPr>
             <a:spLocks noGrp="1"/>
           </p:cNvSpPr>
@@ -2912,8 +2890,8 @@
         </p:nvSpPr>
         <p:spPr>
           <a:xfrm>
-            <a:off x="838200" y="6356350"/>
-            <a:ext cx="2743200" cy="365125"/>
+            <a:off x="1142996" y="6223828"/>
+            <a:ext cx="2329074" cy="365125"/>
           </a:xfrm>
           <a:prstGeom prst="rect">
             <a:avLst/>
@@ -2925,9 +2903,7 @@
             <a:lvl1pPr algn="l">
               <a:defRPr sz="1200">
                 <a:solidFill>
-                  <a:schemeClr val="tx1">
-                    <a:tint val="75000"/>
-                  </a:schemeClr>
+                  <a:schemeClr val="accent1"/>
                 </a:solidFill>
               </a:defRPr>
             </a:lvl1pPr>
@@ -2935,7 +2911,7 @@
           <a:p>
             <a:fld id="{1A670E6B-6FFF-4C4E-911D-FC811DD883A8}" type="datetimeFigureOut">
               <a:rPr lang="ru-RU" smtClean="0"/>
-              <a:t>16.06.2023</a:t>
+              <a:t>21.06.2023</a:t>
             </a:fld>
             <a:endParaRPr lang="ru-RU"/>
           </a:p>
@@ -2943,13 +2919,7 @@
       </p:sp>
       <p:sp>
         <p:nvSpPr>
-          <p:cNvPr id="5" name="Footer Placeholder 4">
-            <a:extLst>
-              <a:ext uri="{FF2B5EF4-FFF2-40B4-BE49-F238E27FC236}">
-                <a16:creationId xmlns:a16="http://schemas.microsoft.com/office/drawing/2014/main" id="{CEA49053-A3C3-430B-AE7F-6D0F3C18F1D2}"/>
-              </a:ext>
-            </a:extLst>
-          </p:cNvPr>
+          <p:cNvPr id="5" name="Footer Placeholder 4"/>
           <p:cNvSpPr>
             <a:spLocks noGrp="1"/>
           </p:cNvSpPr>
@@ -2959,8 +2929,8 @@
         </p:nvSpPr>
         <p:spPr>
           <a:xfrm>
-            <a:off x="4038600" y="6356350"/>
-            <a:ext cx="4114800" cy="365125"/>
+            <a:off x="3949148" y="6223828"/>
+            <a:ext cx="4717774" cy="365125"/>
           </a:xfrm>
           <a:prstGeom prst="rect">
             <a:avLst/>
@@ -2972,9 +2942,7 @@
             <a:lvl1pPr algn="ctr">
               <a:defRPr sz="1200">
                 <a:solidFill>
-                  <a:schemeClr val="tx1">
-                    <a:tint val="75000"/>
-                  </a:schemeClr>
+                  <a:schemeClr val="accent1"/>
                 </a:solidFill>
               </a:defRPr>
             </a:lvl1pPr>
@@ -2986,13 +2954,7 @@
       </p:sp>
       <p:sp>
         <p:nvSpPr>
-          <p:cNvPr id="6" name="Slide Number Placeholder 5">
-            <a:extLst>
-              <a:ext uri="{FF2B5EF4-FFF2-40B4-BE49-F238E27FC236}">
-                <a16:creationId xmlns:a16="http://schemas.microsoft.com/office/drawing/2014/main" id="{37B77D9E-8AD3-47A2-80C6-E1F655E18605}"/>
-              </a:ext>
-            </a:extLst>
-          </p:cNvPr>
+          <p:cNvPr id="6" name="Slide Number Placeholder 5"/>
           <p:cNvSpPr>
             <a:spLocks noGrp="1"/>
           </p:cNvSpPr>
@@ -3002,8 +2964,8 @@
         </p:nvSpPr>
         <p:spPr>
           <a:xfrm>
-            <a:off x="8610600" y="6356350"/>
-            <a:ext cx="2743200" cy="365125"/>
+            <a:off x="9329530" y="6223828"/>
+            <a:ext cx="1706217" cy="365125"/>
           </a:xfrm>
           <a:prstGeom prst="rect">
             <a:avLst/>
@@ -3015,9 +2977,7 @@
             <a:lvl1pPr algn="r">
               <a:defRPr sz="1200">
                 <a:solidFill>
-                  <a:schemeClr val="tx1">
-                    <a:tint val="75000"/>
-                  </a:schemeClr>
+                  <a:schemeClr val="accent1"/>
                 </a:solidFill>
               </a:defRPr>
             </a:lvl1pPr>
@@ -3034,23 +2994,23 @@
     </p:spTree>
     <p:extLst>
       <p:ext uri="{BB962C8B-B14F-4D97-AF65-F5344CB8AC3E}">
-        <p14:creationId xmlns:p14="http://schemas.microsoft.com/office/powerpoint/2010/main" val="3349062875"/>
+        <p14:creationId xmlns:p14="http://schemas.microsoft.com/office/powerpoint/2010/main" val="1353890177"/>
       </p:ext>
     </p:extLst>
   </p:cSld>
   <p:clrMap bg1="lt1" tx1="dk1" bg2="lt2" tx2="dk2" accent1="accent1" accent2="accent2" accent3="accent3" accent4="accent4" accent5="accent5" accent6="accent6" hlink="hlink" folHlink="folHlink"/>
   <p:sldLayoutIdLst>
-    <p:sldLayoutId id="2147483649" r:id="rId1"/>
-    <p:sldLayoutId id="2147483650" r:id="rId2"/>
-    <p:sldLayoutId id="2147483651" r:id="rId3"/>
-    <p:sldLayoutId id="2147483652" r:id="rId4"/>
-    <p:sldLayoutId id="2147483653" r:id="rId5"/>
-    <p:sldLayoutId id="2147483654" r:id="rId6"/>
-    <p:sldLayoutId id="2147483655" r:id="rId7"/>
-    <p:sldLayoutId id="2147483656" r:id="rId8"/>
-    <p:sldLayoutId id="2147483657" r:id="rId9"/>
-    <p:sldLayoutId id="2147483658" r:id="rId10"/>
-    <p:sldLayoutId id="2147483659" r:id="rId11"/>
+    <p:sldLayoutId id="2147483661" r:id="rId1"/>
+    <p:sldLayoutId id="2147483662" r:id="rId2"/>
+    <p:sldLayoutId id="2147483663" r:id="rId3"/>
+    <p:sldLayoutId id="2147483664" r:id="rId4"/>
+    <p:sldLayoutId id="2147483665" r:id="rId5"/>
+    <p:sldLayoutId id="2147483666" r:id="rId6"/>
+    <p:sldLayoutId id="2147483667" r:id="rId7"/>
+    <p:sldLayoutId id="2147483668" r:id="rId8"/>
+    <p:sldLayoutId id="2147483669" r:id="rId9"/>
+    <p:sldLayoutId id="2147483670" r:id="rId10"/>
+    <p:sldLayoutId id="2147483671" r:id="rId11"/>
   </p:sldLayoutIdLst>
   <p:txStyles>
     <p:titleStyle>
@@ -3064,7 +3024,7 @@
         <a:buNone/>
         <a:defRPr sz="4400" kern="1200">
           <a:solidFill>
-            <a:schemeClr val="tx1"/>
+            <a:schemeClr val="accent1"/>
           </a:solidFill>
           <a:latin typeface="+mj-lt"/>
           <a:ea typeface="+mj-ea"/>
@@ -3073,162 +3033,222 @@
       </a:lvl1pPr>
     </p:titleStyle>
     <p:bodyStyle>
-      <a:lvl1pPr marL="228600" indent="-228600" algn="l" defTabSz="914400" rtl="0" eaLnBrk="1" latinLnBrk="0" hangingPunct="1">
+      <a:lvl1pPr marL="228600" indent="-182880" algn="l" defTabSz="914400" rtl="0" eaLnBrk="1" latinLnBrk="0" hangingPunct="1">
         <a:lnSpc>
           <a:spcPct val="90000"/>
         </a:lnSpc>
         <a:spcBef>
-          <a:spcPts val="1000"/>
+          <a:spcPts val="1400"/>
         </a:spcBef>
-        <a:buFont typeface="Arial" panose="020B0604020202020204" pitchFamily="34" charset="0"/>
+        <a:buClr>
+          <a:schemeClr val="accent1"/>
+        </a:buClr>
+        <a:buSzPct val="80000"/>
+        <a:buFont typeface="Corbel" pitchFamily="34" charset="0"/>
         <a:buChar char="•"/>
-        <a:defRPr sz="2800" kern="1200">
+        <a:defRPr sz="2200" kern="1200">
           <a:solidFill>
-            <a:schemeClr val="tx1"/>
+            <a:schemeClr val="accent1"/>
           </a:solidFill>
           <a:latin typeface="+mn-lt"/>
           <a:ea typeface="+mn-ea"/>
           <a:cs typeface="+mn-cs"/>
         </a:defRPr>
       </a:lvl1pPr>
-      <a:lvl2pPr marL="685800" indent="-228600" algn="l" defTabSz="914400" rtl="0" eaLnBrk="1" latinLnBrk="0" hangingPunct="1">
+      <a:lvl2pPr marL="457200" indent="-182880" algn="l" defTabSz="914400" rtl="0" eaLnBrk="1" latinLnBrk="0" hangingPunct="1">
         <a:lnSpc>
           <a:spcPct val="90000"/>
         </a:lnSpc>
         <a:spcBef>
-          <a:spcPts val="500"/>
+          <a:spcPts val="200"/>
         </a:spcBef>
-        <a:buFont typeface="Arial" panose="020B0604020202020204" pitchFamily="34" charset="0"/>
+        <a:spcAft>
+          <a:spcPts val="400"/>
+        </a:spcAft>
+        <a:buClr>
+          <a:schemeClr val="accent1"/>
+        </a:buClr>
+        <a:buSzPct val="80000"/>
+        <a:buFont typeface="Corbel" pitchFamily="34" charset="0"/>
         <a:buChar char="•"/>
-        <a:defRPr sz="2400" kern="1200">
+        <a:defRPr sz="2000" kern="1200">
           <a:solidFill>
-            <a:schemeClr val="tx1"/>
+            <a:schemeClr val="accent1"/>
           </a:solidFill>
           <a:latin typeface="+mn-lt"/>
           <a:ea typeface="+mn-ea"/>
           <a:cs typeface="+mn-cs"/>
         </a:defRPr>
       </a:lvl2pPr>
-      <a:lvl3pPr marL="1143000" indent="-228600" algn="l" defTabSz="914400" rtl="0" eaLnBrk="1" latinLnBrk="0" hangingPunct="1">
+      <a:lvl3pPr marL="731520" indent="-182880" algn="l" defTabSz="914400" rtl="0" eaLnBrk="1" latinLnBrk="0" hangingPunct="1">
         <a:lnSpc>
           <a:spcPct val="90000"/>
         </a:lnSpc>
         <a:spcBef>
-          <a:spcPts val="500"/>
+          <a:spcPts val="200"/>
         </a:spcBef>
-        <a:buFont typeface="Arial" panose="020B0604020202020204" pitchFamily="34" charset="0"/>
+        <a:spcAft>
+          <a:spcPts val="400"/>
+        </a:spcAft>
+        <a:buClr>
+          <a:schemeClr val="accent1"/>
+        </a:buClr>
+        <a:buSzPct val="80000"/>
+        <a:buFont typeface="Corbel" pitchFamily="34" charset="0"/>
         <a:buChar char="•"/>
-        <a:defRPr sz="2000" kern="1200">
+        <a:defRPr sz="1800" kern="1200">
           <a:solidFill>
-            <a:schemeClr val="tx1"/>
+            <a:schemeClr val="accent1"/>
           </a:solidFill>
           <a:latin typeface="+mn-lt"/>
           <a:ea typeface="+mn-ea"/>
           <a:cs typeface="+mn-cs"/>
         </a:defRPr>
       </a:lvl3pPr>
-      <a:lvl4pPr marL="1600200" indent="-228600" algn="l" defTabSz="914400" rtl="0" eaLnBrk="1" latinLnBrk="0" hangingPunct="1">
+      <a:lvl4pPr marL="1005840" indent="-182880" algn="l" defTabSz="914400" rtl="0" eaLnBrk="1" latinLnBrk="0" hangingPunct="1">
         <a:lnSpc>
           <a:spcPct val="90000"/>
         </a:lnSpc>
         <a:spcBef>
-          <a:spcPts val="500"/>
+          <a:spcPts val="200"/>
         </a:spcBef>
-        <a:buFont typeface="Arial" panose="020B0604020202020204" pitchFamily="34" charset="0"/>
+        <a:spcAft>
+          <a:spcPts val="400"/>
+        </a:spcAft>
+        <a:buClr>
+          <a:schemeClr val="accent1"/>
+        </a:buClr>
+        <a:buSzPct val="80000"/>
+        <a:buFont typeface="Corbel" pitchFamily="34" charset="0"/>
         <a:buChar char="•"/>
-        <a:defRPr sz="1800" kern="1200">
+        <a:defRPr sz="1600" kern="1200">
           <a:solidFill>
-            <a:schemeClr val="tx1"/>
+            <a:schemeClr val="accent1"/>
           </a:solidFill>
           <a:latin typeface="+mn-lt"/>
           <a:ea typeface="+mn-ea"/>
           <a:cs typeface="+mn-cs"/>
         </a:defRPr>
       </a:lvl4pPr>
-      <a:lvl5pPr marL="2057400" indent="-228600" algn="l" defTabSz="914400" rtl="0" eaLnBrk="1" latinLnBrk="0" hangingPunct="1">
+      <a:lvl5pPr marL="1280160" indent="-182880" algn="l" defTabSz="914400" rtl="0" eaLnBrk="1" latinLnBrk="0" hangingPunct="1">
         <a:lnSpc>
           <a:spcPct val="90000"/>
         </a:lnSpc>
         <a:spcBef>
-          <a:spcPts val="500"/>
+          <a:spcPts val="200"/>
         </a:spcBef>
-        <a:buFont typeface="Arial" panose="020B0604020202020204" pitchFamily="34" charset="0"/>
+        <a:spcAft>
+          <a:spcPts val="400"/>
+        </a:spcAft>
+        <a:buClr>
+          <a:schemeClr val="accent1"/>
+        </a:buClr>
+        <a:buSzPct val="80000"/>
+        <a:buFont typeface="Corbel" pitchFamily="34" charset="0"/>
         <a:buChar char="•"/>
-        <a:defRPr sz="1800" kern="1200">
+        <a:defRPr sz="1600" kern="1200">
           <a:solidFill>
-            <a:schemeClr val="tx1"/>
+            <a:schemeClr val="accent1"/>
           </a:solidFill>
           <a:latin typeface="+mn-lt"/>
           <a:ea typeface="+mn-ea"/>
           <a:cs typeface="+mn-cs"/>
         </a:defRPr>
       </a:lvl5pPr>
-      <a:lvl6pPr marL="2514600" indent="-228600" algn="l" defTabSz="914400" rtl="0" eaLnBrk="1" latinLnBrk="0" hangingPunct="1">
+      <a:lvl6pPr marL="1600000" indent="-228600" algn="l" defTabSz="914400" rtl="0" eaLnBrk="1" latinLnBrk="0" hangingPunct="1">
         <a:lnSpc>
           <a:spcPct val="90000"/>
         </a:lnSpc>
         <a:spcBef>
-          <a:spcPts val="500"/>
+          <a:spcPts val="200"/>
         </a:spcBef>
-        <a:buFont typeface="Arial" panose="020B0604020202020204" pitchFamily="34" charset="0"/>
+        <a:spcAft>
+          <a:spcPts val="400"/>
+        </a:spcAft>
+        <a:buClr>
+          <a:schemeClr val="accent1"/>
+        </a:buClr>
+        <a:buSzPct val="80000"/>
+        <a:buFont typeface="Corbel" pitchFamily="34" charset="0"/>
         <a:buChar char="•"/>
-        <a:defRPr sz="1800" kern="1200">
+        <a:defRPr sz="1600" kern="1200">
           <a:solidFill>
-            <a:schemeClr val="tx1"/>
+            <a:schemeClr val="accent1"/>
           </a:solidFill>
           <a:latin typeface="+mn-lt"/>
           <a:ea typeface="+mn-ea"/>
           <a:cs typeface="+mn-cs"/>
         </a:defRPr>
       </a:lvl6pPr>
-      <a:lvl7pPr marL="2971800" indent="-228600" algn="l" defTabSz="914400" rtl="0" eaLnBrk="1" latinLnBrk="0" hangingPunct="1">
+      <a:lvl7pPr marL="1900000" indent="-228600" algn="l" defTabSz="914400" rtl="0" eaLnBrk="1" latinLnBrk="0" hangingPunct="1">
         <a:lnSpc>
           <a:spcPct val="90000"/>
         </a:lnSpc>
         <a:spcBef>
-          <a:spcPts val="500"/>
+          <a:spcPts val="200"/>
         </a:spcBef>
-        <a:buFont typeface="Arial" panose="020B0604020202020204" pitchFamily="34" charset="0"/>
+        <a:spcAft>
+          <a:spcPts val="400"/>
+        </a:spcAft>
+        <a:buClr>
+          <a:schemeClr val="accent1"/>
+        </a:buClr>
+        <a:buSzPct val="80000"/>
+        <a:buFont typeface="Corbel" pitchFamily="34" charset="0"/>
         <a:buChar char="•"/>
-        <a:defRPr sz="1800" kern="1200">
+        <a:defRPr sz="1600" kern="1200">
           <a:solidFill>
-            <a:schemeClr val="tx1"/>
+            <a:schemeClr val="accent1"/>
           </a:solidFill>
           <a:latin typeface="+mn-lt"/>
           <a:ea typeface="+mn-ea"/>
           <a:cs typeface="+mn-cs"/>
         </a:defRPr>
       </a:lvl7pPr>
-      <a:lvl8pPr marL="3429000" indent="-228600" algn="l" defTabSz="914400" rtl="0" eaLnBrk="1" latinLnBrk="0" hangingPunct="1">
+      <a:lvl8pPr marL="2200000" indent="-228600" algn="l" defTabSz="914400" rtl="0" eaLnBrk="1" latinLnBrk="0" hangingPunct="1">
         <a:lnSpc>
           <a:spcPct val="90000"/>
         </a:lnSpc>
         <a:spcBef>
-          <a:spcPts val="500"/>
+          <a:spcPts val="200"/>
         </a:spcBef>
-        <a:buFont typeface="Arial" panose="020B0604020202020204" pitchFamily="34" charset="0"/>
+        <a:spcAft>
+          <a:spcPts val="400"/>
+        </a:spcAft>
+        <a:buClr>
+          <a:schemeClr val="accent1"/>
+        </a:buClr>
+        <a:buSzPct val="80000"/>
+        <a:buFont typeface="Corbel" pitchFamily="34" charset="0"/>
         <a:buChar char="•"/>
-        <a:defRPr sz="1800" kern="1200">
+        <a:defRPr sz="1600" kern="1200">
           <a:solidFill>
-            <a:schemeClr val="tx1"/>
+            <a:schemeClr val="accent1"/>
           </a:solidFill>
           <a:latin typeface="+mn-lt"/>
           <a:ea typeface="+mn-ea"/>
           <a:cs typeface="+mn-cs"/>
         </a:defRPr>
       </a:lvl8pPr>
-      <a:lvl9pPr marL="3886200" indent="-228600" algn="l" defTabSz="914400" rtl="0" eaLnBrk="1" latinLnBrk="0" hangingPunct="1">
+      <a:lvl9pPr marL="2500000" indent="-228600" algn="l" defTabSz="914400" rtl="0" eaLnBrk="1" latinLnBrk="0" hangingPunct="1">
         <a:lnSpc>
           <a:spcPct val="90000"/>
         </a:lnSpc>
         <a:spcBef>
-          <a:spcPts val="500"/>
+          <a:spcPts val="200"/>
         </a:spcBef>
-        <a:buFont typeface="Arial" panose="020B0604020202020204" pitchFamily="34" charset="0"/>
+        <a:spcAft>
+          <a:spcPts val="400"/>
+        </a:spcAft>
+        <a:buClr>
+          <a:schemeClr val="accent1"/>
+        </a:buClr>
+        <a:buSzPct val="80000"/>
+        <a:buFont typeface="Corbel" pitchFamily="34" charset="0"/>
         <a:buChar char="•"/>
-        <a:defRPr sz="1800" kern="1200">
+        <a:defRPr sz="1600" kern="1200">
           <a:solidFill>
-            <a:schemeClr val="tx1"/>
+            <a:schemeClr val="accent1"/>
           </a:solidFill>
           <a:latin typeface="+mn-lt"/>
           <a:ea typeface="+mn-ea"/>
@@ -3238,7 +3258,7 @@
     </p:bodyStyle>
     <p:otherStyle>
       <a:defPPr>
-        <a:defRPr lang="ru-RU"/>
+        <a:defRPr lang="en-US"/>
       </a:defPPr>
       <a:lvl1pPr marL="0" algn="l" defTabSz="914400" rtl="0" eaLnBrk="1" latinLnBrk="0" hangingPunct="1">
         <a:defRPr sz="1800" kern="1200">
@@ -3408,7 +3428,7 @@
             <a:pPr algn="r"/>
             <a:r>
               <a:rPr lang="ru-RU" dirty="0"/>
-              <a:t>Кузнецов Иван 4-ИС-2</a:t>
+              <a:t>Кузнецов Иван</a:t>
             </a:r>
           </a:p>
         </p:txBody>
@@ -3554,6 +3574,9 @@
   <p:clrMapOvr>
     <a:masterClrMapping/>
   </p:clrMapOvr>
+  <p:transition spd="med">
+    <p:pull/>
+  </p:transition>
 </p:sld>
 </file>
 
@@ -3626,8 +3649,8 @@
         </p:blipFill>
         <p:spPr>
           <a:xfrm>
-            <a:off x="2286476" y="1858437"/>
-            <a:ext cx="7619048" cy="4285714"/>
+            <a:off x="2489464" y="2057400"/>
+            <a:ext cx="7179734" cy="4038600"/>
           </a:xfrm>
           <a:prstGeom prst="rect">
             <a:avLst/>
@@ -3644,6 +3667,9 @@
   <p:clrMapOvr>
     <a:masterClrMapping/>
   </p:clrMapOvr>
+  <p:transition spd="med">
+    <p:pull/>
+  </p:transition>
 </p:sld>
 </file>
 
@@ -3716,8 +3742,8 @@
         </p:blipFill>
         <p:spPr>
           <a:xfrm>
-            <a:off x="3170731" y="1825625"/>
-            <a:ext cx="5850538" cy="4351338"/>
+            <a:off x="3364306" y="2057400"/>
+            <a:ext cx="5430050" cy="4038600"/>
           </a:xfrm>
           <a:prstGeom prst="rect">
             <a:avLst/>
@@ -3734,6 +3760,9 @@
   <p:clrMapOvr>
     <a:masterClrMapping/>
   </p:clrMapOvr>
+  <p:transition spd="med">
+    <p:pull/>
+  </p:transition>
 </p:sld>
 </file>
 
@@ -3806,8 +3835,8 @@
         </p:blipFill>
         <p:spPr>
           <a:xfrm>
-            <a:off x="2653674" y="1825625"/>
-            <a:ext cx="6884651" cy="4351338"/>
+            <a:off x="2884412" y="2057400"/>
+            <a:ext cx="6389839" cy="4038600"/>
           </a:xfrm>
           <a:prstGeom prst="rect">
             <a:avLst/>
@@ -3824,6 +3853,9 @@
   <p:clrMapOvr>
     <a:masterClrMapping/>
   </p:clrMapOvr>
+  <p:transition spd="med">
+    <p:pull/>
+  </p:transition>
 </p:sld>
 </file>
 
@@ -3925,114 +3957,65 @@
   <p:clrMapOvr>
     <a:masterClrMapping/>
   </p:clrMapOvr>
+  <p:transition spd="med">
+    <p:pull/>
+  </p:transition>
 </p:sld>
 </file>
 
 <file path=ppt/theme/theme1.xml><?xml version="1.0" encoding="utf-8"?>
-<a:theme xmlns:a="http://schemas.openxmlformats.org/drawingml/2006/main" name="Office Theme">
+<a:theme xmlns:a="http://schemas.openxmlformats.org/drawingml/2006/main" name="Basis">
   <a:themeElements>
-    <a:clrScheme name="Office">
+    <a:clrScheme name="Basis">
       <a:dk1>
-        <a:sysClr val="windowText" lastClr="000000"/>
+        <a:srgbClr val="000000"/>
       </a:dk1>
       <a:lt1>
-        <a:sysClr val="window" lastClr="FFFFFF"/>
+        <a:srgbClr val="FFFFFF"/>
       </a:lt1>
       <a:dk2>
-        <a:srgbClr val="44546A"/>
+        <a:srgbClr val="565349"/>
       </a:dk2>
       <a:lt2>
-        <a:srgbClr val="E7E6E6"/>
+        <a:srgbClr val="DDDDDD"/>
       </a:lt2>
       <a:accent1>
-        <a:srgbClr val="4472C4"/>
+        <a:srgbClr val="A6B727"/>
       </a:accent1>
       <a:accent2>
-        <a:srgbClr val="ED7D31"/>
+        <a:srgbClr val="DF5327"/>
       </a:accent2>
       <a:accent3>
-        <a:srgbClr val="A5A5A5"/>
+        <a:srgbClr val="FE9E00"/>
       </a:accent3>
       <a:accent4>
-        <a:srgbClr val="FFC000"/>
+        <a:srgbClr val="418AB3"/>
       </a:accent4>
       <a:accent5>
-        <a:srgbClr val="5B9BD5"/>
+        <a:srgbClr val="D7D447"/>
       </a:accent5>
       <a:accent6>
-        <a:srgbClr val="70AD47"/>
+        <a:srgbClr val="818183"/>
       </a:accent6>
       <a:hlink>
-        <a:srgbClr val="0563C1"/>
+        <a:srgbClr val="F59E00"/>
       </a:hlink>
       <a:folHlink>
-        <a:srgbClr val="954F72"/>
+        <a:srgbClr val="B2B2B2"/>
       </a:folHlink>
     </a:clrScheme>
-    <a:fontScheme name="Office">
+    <a:fontScheme name="Basis">
       <a:majorFont>
-        <a:latin typeface="Calibri Light" panose="020F0302020204030204"/>
+        <a:latin typeface="Corbel" panose="020B0503020204020204"/>
         <a:ea typeface=""/>
         <a:cs typeface=""/>
-        <a:font script="Jpan" typeface="游ゴシック Light"/>
+        <a:font script="Jpan" typeface="ＭＳ ゴシック"/>
         <a:font script="Hang" typeface="맑은 고딕"/>
-        <a:font script="Hans" typeface="等线 Light"/>
+        <a:font script="Hans" typeface="宋体"/>
         <a:font script="Hant" typeface="新細明體"/>
-        <a:font script="Arab" typeface="Times New Roman"/>
-        <a:font script="Hebr" typeface="Times New Roman"/>
-        <a:font script="Thai" typeface="Angsana New"/>
-        <a:font script="Ethi" typeface="Nyala"/>
-        <a:font script="Beng" typeface="Vrinda"/>
-        <a:font script="Gujr" typeface="Shruti"/>
-        <a:font script="Khmr" typeface="MoolBoran"/>
-        <a:font script="Knda" typeface="Tunga"/>
-        <a:font script="Guru" typeface="Raavi"/>
-        <a:font script="Cans" typeface="Euphemia"/>
-        <a:font script="Cher" typeface="Plantagenet Cherokee"/>
-        <a:font script="Yiii" typeface="Microsoft Yi Baiti"/>
-        <a:font script="Tibt" typeface="Microsoft Himalaya"/>
-        <a:font script="Thaa" typeface="MV Boli"/>
-        <a:font script="Deva" typeface="Mangal"/>
-        <a:font script="Telu" typeface="Gautami"/>
-        <a:font script="Taml" typeface="Latha"/>
-        <a:font script="Syrc" typeface="Estrangelo Edessa"/>
-        <a:font script="Orya" typeface="Kalinga"/>
-        <a:font script="Mlym" typeface="Kartika"/>
-        <a:font script="Laoo" typeface="DokChampa"/>
-        <a:font script="Sinh" typeface="Iskoola Pota"/>
-        <a:font script="Mong" typeface="Mongolian Baiti"/>
-        <a:font script="Viet" typeface="Times New Roman"/>
-        <a:font script="Uigh" typeface="Microsoft Uighur"/>
-        <a:font script="Geor" typeface="Sylfaen"/>
-        <a:font script="Armn" typeface="Arial"/>
-        <a:font script="Bugi" typeface="Leelawadee UI"/>
-        <a:font script="Bopo" typeface="Microsoft JhengHei"/>
-        <a:font script="Java" typeface="Javanese Text"/>
-        <a:font script="Lisu" typeface="Segoe UI"/>
-        <a:font script="Mymr" typeface="Myanmar Text"/>
-        <a:font script="Nkoo" typeface="Ebrima"/>
-        <a:font script="Olck" typeface="Nirmala UI"/>
-        <a:font script="Osma" typeface="Ebrima"/>
-        <a:font script="Phag" typeface="Phagspa"/>
-        <a:font script="Syrn" typeface="Estrangelo Edessa"/>
-        <a:font script="Syrj" typeface="Estrangelo Edessa"/>
-        <a:font script="Syre" typeface="Estrangelo Edessa"/>
-        <a:font script="Sora" typeface="Nirmala UI"/>
-        <a:font script="Tale" typeface="Microsoft Tai Le"/>
-        <a:font script="Talu" typeface="Microsoft New Tai Lue"/>
-        <a:font script="Tfng" typeface="Ebrima"/>
-      </a:majorFont>
-      <a:minorFont>
-        <a:latin typeface="Calibri" panose="020F0502020204030204"/>
-        <a:ea typeface=""/>
-        <a:cs typeface=""/>
-        <a:font script="Jpan" typeface="游ゴシック"/>
-        <a:font script="Hang" typeface="맑은 고딕"/>
-        <a:font script="Hans" typeface="等线"/>
-        <a:font script="Hant" typeface="新細明體"/>
-        <a:font script="Arab" typeface="Arial"/>
-        <a:font script="Hebr" typeface="Arial"/>
-        <a:font script="Thai" typeface="Cordia New"/>
+        <a:font script="Arab" typeface="Tahoma"/>
+        <a:font script="Hebr" typeface="Gisha"/>
+        <a:font script="Thai" typeface="DilleniaUPC"/>
         <a:font script="Ethi" typeface="Nyala"/>
         <a:font script="Beng" typeface="Vrinda"/>
         <a:font script="Gujr" typeface="Shruti"/>
@@ -4053,107 +4036,98 @@
         <a:font script="Laoo" typeface="DokChampa"/>
         <a:font script="Sinh" typeface="Iskoola Pota"/>
         <a:font script="Mong" typeface="Mongolian Baiti"/>
-        <a:font script="Viet" typeface="Arial"/>
+        <a:font script="Viet" typeface="Tahoma"/>
         <a:font script="Uigh" typeface="Microsoft Uighur"/>
         <a:font script="Geor" typeface="Sylfaen"/>
-        <a:font script="Armn" typeface="Arial"/>
-        <a:font script="Bugi" typeface="Leelawadee UI"/>
-        <a:font script="Bopo" typeface="Microsoft JhengHei"/>
-        <a:font script="Java" typeface="Javanese Text"/>
-        <a:font script="Lisu" typeface="Segoe UI"/>
-        <a:font script="Mymr" typeface="Myanmar Text"/>
-        <a:font script="Nkoo" typeface="Ebrima"/>
-        <a:font script="Olck" typeface="Nirmala UI"/>
-        <a:font script="Osma" typeface="Ebrima"/>
-        <a:font script="Phag" typeface="Phagspa"/>
-        <a:font script="Syrn" typeface="Estrangelo Edessa"/>
-        <a:font script="Syrj" typeface="Estrangelo Edessa"/>
-        <a:font script="Syre" typeface="Estrangelo Edessa"/>
-        <a:font script="Sora" typeface="Nirmala UI"/>
-        <a:font script="Tale" typeface="Microsoft Tai Le"/>
-        <a:font script="Talu" typeface="Microsoft New Tai Lue"/>
-        <a:font script="Tfng" typeface="Ebrima"/>
+      </a:majorFont>
+      <a:minorFont>
+        <a:latin typeface="Corbel" panose="020B0503020204020204"/>
+        <a:ea typeface=""/>
+        <a:cs typeface=""/>
+        <a:font script="Jpan" typeface="ＭＳ ゴシック"/>
+        <a:font script="Hang" typeface="맑은 고딕"/>
+        <a:font script="Hans" typeface="宋体"/>
+        <a:font script="Hant" typeface="新細明體"/>
+        <a:font script="Arab" typeface="Tahoma"/>
+        <a:font script="Hebr" typeface="Gisha"/>
+        <a:font script="Thai" typeface="DilleniaUPC"/>
+        <a:font script="Ethi" typeface="Nyala"/>
+        <a:font script="Beng" typeface="Vrinda"/>
+        <a:font script="Gujr" typeface="Shruti"/>
+        <a:font script="Khmr" typeface="DaunPenh"/>
+        <a:font script="Knda" typeface="Tunga"/>
+        <a:font script="Guru" typeface="Raavi"/>
+        <a:font script="Cans" typeface="Euphemia"/>
+        <a:font script="Cher" typeface="Plantagenet Cherokee"/>
+        <a:font script="Yiii" typeface="Microsoft Yi Baiti"/>
+        <a:font script="Tibt" typeface="Microsoft Himalaya"/>
+        <a:font script="Thaa" typeface="MV Boli"/>
+        <a:font script="Deva" typeface="Mangal"/>
+        <a:font script="Telu" typeface="Gautami"/>
+        <a:font script="Taml" typeface="Latha"/>
+        <a:font script="Syrc" typeface="Estrangelo Edessa"/>
+        <a:font script="Orya" typeface="Kalinga"/>
+        <a:font script="Mlym" typeface="Kartika"/>
+        <a:font script="Laoo" typeface="DokChampa"/>
+        <a:font script="Sinh" typeface="Iskoola Pota"/>
+        <a:font script="Mong" typeface="Mongolian Baiti"/>
+        <a:font script="Viet" typeface="Verdana"/>
+        <a:font script="Uigh" typeface="Microsoft Uighur"/>
+        <a:font script="Geor" typeface="Sylfaen"/>
       </a:minorFont>
     </a:fontScheme>
-    <a:fmtScheme name="Office">
+    <a:fmtScheme name="Basis">
       <a:fillStyleLst>
         <a:solidFill>
           <a:schemeClr val="phClr"/>
         </a:solidFill>
+        <a:solidFill>
+          <a:schemeClr val="phClr">
+            <a:tint val="55000"/>
+            <a:satMod val="130000"/>
+          </a:schemeClr>
+        </a:solidFill>
         <a:gradFill rotWithShape="1">
           <a:gsLst>
             <a:gs pos="0">
+              <a:schemeClr val="phClr"/>
+            </a:gs>
+            <a:gs pos="90000">
               <a:schemeClr val="phClr">
-                <a:lumMod val="110000"/>
+                <a:shade val="100000"/>
                 <a:satMod val="105000"/>
-                <a:tint val="67000"/>
-              </a:schemeClr>
-            </a:gs>
-            <a:gs pos="50000">
-              <a:schemeClr val="phClr">
-                <a:lumMod val="105000"/>
-                <a:satMod val="103000"/>
-                <a:tint val="73000"/>
               </a:schemeClr>
             </a:gs>
             <a:gs pos="100000">
               <a:schemeClr val="phClr">
-                <a:lumMod val="105000"/>
-                <a:satMod val="109000"/>
-                <a:tint val="81000"/>
+                <a:shade val="80000"/>
+                <a:satMod val="120000"/>
               </a:schemeClr>
             </a:gs>
           </a:gsLst>
-          <a:lin ang="5400000" scaled="0"/>
-        </a:gradFill>
-        <a:gradFill rotWithShape="1">
-          <a:gsLst>
-            <a:gs pos="0">
-              <a:schemeClr val="phClr">
-                <a:satMod val="103000"/>
-                <a:lumMod val="102000"/>
-                <a:tint val="94000"/>
-              </a:schemeClr>
-            </a:gs>
-            <a:gs pos="50000">
-              <a:schemeClr val="phClr">
-                <a:satMod val="110000"/>
-                <a:lumMod val="100000"/>
-                <a:shade val="100000"/>
-              </a:schemeClr>
-            </a:gs>
-            <a:gs pos="100000">
-              <a:schemeClr val="phClr">
-                <a:lumMod val="99000"/>
-                <a:satMod val="120000"/>
-                <a:shade val="78000"/>
-              </a:schemeClr>
-            </a:gs>
-          </a:gsLst>
-          <a:lin ang="5400000" scaled="0"/>
+          <a:path path="circle">
+            <a:fillToRect l="100000" t="100000" r="100000" b="100000"/>
+          </a:path>
         </a:gradFill>
       </a:fillStyleLst>
       <a:lnStyleLst>
-        <a:ln w="6350" cap="flat" cmpd="sng" algn="ctr">
+        <a:ln w="10000" cap="flat" cmpd="sng" algn="ctr">
           <a:solidFill>
             <a:schemeClr val="phClr"/>
           </a:solidFill>
           <a:prstDash val="solid"/>
-          <a:miter lim="800000"/>
-        </a:ln>
-        <a:ln w="12700" cap="flat" cmpd="sng" algn="ctr">
-          <a:solidFill>
-            <a:schemeClr val="phClr"/>
-          </a:solidFill>
-          <a:prstDash val="solid"/>
-          <a:miter lim="800000"/>
         </a:ln>
         <a:ln w="19050" cap="flat" cmpd="sng" algn="ctr">
           <a:solidFill>
             <a:schemeClr val="phClr"/>
           </a:solidFill>
           <a:prstDash val="solid"/>
-          <a:miter lim="800000"/>
+        </a:ln>
+        <a:ln w="53975" cap="flat" cmpd="dbl" algn="ctr">
+          <a:solidFill>
+            <a:schemeClr val="phClr"/>
+          </a:solidFill>
+          <a:prstDash val="solid"/>
         </a:ln>
       </a:lnStyleLst>
       <a:effectStyleLst>
@@ -4161,16 +4135,37 @@
           <a:effectLst/>
         </a:effectStyle>
         <a:effectStyle>
-          <a:effectLst/>
+          <a:effectLst>
+            <a:outerShdw blurRad="38100" dist="25400" dir="5400000" rotWithShape="0">
+              <a:srgbClr val="000000">
+                <a:alpha val="45000"/>
+              </a:srgbClr>
+            </a:outerShdw>
+          </a:effectLst>
         </a:effectStyle>
         <a:effectStyle>
           <a:effectLst>
-            <a:outerShdw blurRad="57150" dist="19050" dir="5400000" algn="ctr" rotWithShape="0">
+            <a:outerShdw blurRad="38100" dist="25400" dir="5400000" rotWithShape="0">
               <a:srgbClr val="000000">
-                <a:alpha val="63000"/>
+                <a:alpha val="45000"/>
               </a:srgbClr>
             </a:outerShdw>
           </a:effectLst>
+          <a:scene3d>
+            <a:camera prst="orthographicFront">
+              <a:rot lat="0" lon="0" rev="0"/>
+            </a:camera>
+            <a:lightRig rig="brightRoom" dir="t"/>
+          </a:scene3d>
+          <a:sp3d extrusionH="12700" contourW="25400" prstMaterial="flat">
+            <a:bevelT w="63500" h="152400" prst="angle"/>
+            <a:contourClr>
+              <a:schemeClr val="phClr">
+                <a:shade val="27000"/>
+                <a:satMod val="120000"/>
+              </a:schemeClr>
+            </a:contourClr>
+          </a:sp3d>
         </a:effectStyle>
       </a:effectStyleLst>
       <a:bgFillStyleLst>
@@ -4180,36 +4175,18 @@
         <a:solidFill>
           <a:schemeClr val="phClr">
             <a:tint val="95000"/>
-            <a:satMod val="170000"/>
+            <a:shade val="95000"/>
+            <a:satMod val="140000"/>
           </a:schemeClr>
         </a:solidFill>
-        <a:gradFill rotWithShape="1">
-          <a:gsLst>
-            <a:gs pos="0">
-              <a:schemeClr val="phClr">
-                <a:tint val="93000"/>
-                <a:satMod val="150000"/>
-                <a:shade val="98000"/>
-                <a:lumMod val="102000"/>
-              </a:schemeClr>
-            </a:gs>
-            <a:gs pos="50000">
-              <a:schemeClr val="phClr">
-                <a:tint val="98000"/>
-                <a:satMod val="130000"/>
-                <a:shade val="90000"/>
-                <a:lumMod val="103000"/>
-              </a:schemeClr>
-            </a:gs>
-            <a:gs pos="100000">
-              <a:schemeClr val="phClr">
-                <a:shade val="63000"/>
-                <a:satMod val="120000"/>
-              </a:schemeClr>
-            </a:gs>
-          </a:gsLst>
-          <a:lin ang="5400000" scaled="0"/>
-        </a:gradFill>
+        <a:solidFill>
+          <a:schemeClr val="phClr">
+            <a:tint val="90000"/>
+            <a:shade val="85000"/>
+            <a:satMod val="160000"/>
+            <a:lumMod val="110000"/>
+          </a:schemeClr>
+        </a:solidFill>
       </a:bgFillStyleLst>
     </a:fmtScheme>
   </a:themeElements>
@@ -4217,7 +4194,7 @@
   <a:extraClrSchemeLst/>
   <a:extLst>
     <a:ext uri="{05A4C25C-085E-4340-85A3-A5531E510DB2}">
-      <thm15:themeFamily xmlns:thm15="http://schemas.microsoft.com/office/thememl/2012/main" name="Office Theme" id="{62F939B6-93AF-4DB8-9C6B-D6C7DFDC589F}" vid="{4A3C46E8-61CC-4603-A589-7422A47A8E4A}"/>
+      <thm15:themeFamily xmlns:thm15="http://schemas.microsoft.com/office/thememl/2012/main" name="Basis" id="{5665723A-49BA-4B57-8411-A56F8F207965}" vid="{90E45F77-AEFC-46EF-A7C1-5B338C297B02}"/>
     </a:ext>
   </a:extLst>
 </a:theme>
